--- a/문서/[진료] 약 처방 지원 시스템 초안.pptx
+++ b/문서/[진료] 약 처방 지원 시스템 초안.pptx
@@ -8,9 +8,8 @@
     <p:sldId id="262" r:id="rId2"/>
     <p:sldId id="259" r:id="rId3"/>
     <p:sldId id="268" r:id="rId4"/>
-    <p:sldId id="267" r:id="rId5"/>
-    <p:sldId id="269" r:id="rId6"/>
-    <p:sldId id="266" r:id="rId7"/>
+    <p:sldId id="270" r:id="rId5"/>
+    <p:sldId id="266" r:id="rId6"/>
   </p:sldIdLst>
   <p:sldSz cx="12192000" cy="6858000"/>
   <p:notesSz cx="6797675" cy="9926638"/>
@@ -1379,7 +1378,7 @@
             <a:fld id="{3AF05884-44D9-46F9-9718-DBF071077312}" type="datetimeFigureOut">
               <a:rPr lang="ko-KR" altLang="en-US" smtClean="0"/>
               <a:pPr/>
-              <a:t>2026-03-31</a:t>
+              <a:t>2026-04-02</a:t>
             </a:fld>
             <a:endParaRPr lang="ko-KR" altLang="en-US" dirty="0"/>
           </a:p>
@@ -2107,26 +2106,7 @@
                     <a:ea typeface="맑은 고딕" panose="020B0503020000020004" pitchFamily="50" charset="-127"/>
                     <a:cs typeface="Calibri" pitchFamily="34" charset="-120"/>
                   </a:rPr>
-                  <a:t>✓</a:t>
-                </a:r>
-                <a:r>
-                  <a:rPr lang="en-US" sz="1200" b="1" dirty="0">
-                    <a:solidFill>
-                      <a:srgbClr val="0F6E56"/>
-                    </a:solidFill>
-                    <a:latin typeface="맑은 고딕" panose="020B0503020000020004" pitchFamily="50" charset="-127"/>
-                    <a:ea typeface="맑은 고딕" panose="020B0503020000020004" pitchFamily="50" charset="-127"/>
-                    <a:cs typeface="Calibri" pitchFamily="34" charset="-120"/>
-                  </a:rPr>
-                  <a:t>  </a:t>
-                </a:r>
-                <a:r>
-                  <a:rPr lang="en-US" sz="1200" dirty="0">
-                    <a:latin typeface="맑은 고딕" panose="020B0503020000020004" pitchFamily="50" charset="-127"/>
-                    <a:ea typeface="맑은 고딕" panose="020B0503020000020004" pitchFamily="50" charset="-127"/>
-                    <a:cs typeface="Calibri" pitchFamily="34" charset="-120"/>
-                  </a:rPr>
-                  <a:t>ATC </a:t>
+                  <a:t>✓ </a:t>
                 </a:r>
                 <a:r>
                   <a:rPr lang="ko-KR" altLang="en-US" sz="1200" dirty="0">
@@ -2134,7 +2114,7 @@
                     <a:ea typeface="맑은 고딕" panose="020B0503020000020004" pitchFamily="50" charset="-127"/>
                     <a:cs typeface="Calibri" pitchFamily="34" charset="-120"/>
                   </a:rPr>
-                  <a:t>코드 기반 약물 계통 자동 분류</a:t>
+                  <a:t>원하는 증상 관련 과거 처방 이력 추출</a:t>
                 </a:r>
                 <a:endParaRPr lang="en-US" sz="1200" dirty="0">
                   <a:latin typeface="맑은 고딕" panose="020B0503020000020004" pitchFamily="50" charset="-127"/>
@@ -2169,9 +2149,6 @@
               <a:bodyPr wrap="square" rtlCol="0" anchor="ctr"/>
               <a:lstStyle/>
               <a:p>
-                <a:pPr marL="0" indent="0">
-                  <a:buNone/>
-                </a:pPr>
                 <a:r>
                   <a:rPr lang="en-US" sz="1200" b="1" dirty="0">
                     <a:solidFill>
@@ -2181,55 +2158,22 @@
                     <a:ea typeface="맑은 고딕" panose="020B0503020000020004" pitchFamily="50" charset="-127"/>
                     <a:cs typeface="Calibri" pitchFamily="34" charset="-120"/>
                   </a:rPr>
-                  <a:t>✓</a:t>
+                  <a:t>✓ </a:t>
                 </a:r>
                 <a:r>
-                  <a:rPr lang="en-US" sz="1200" b="1" dirty="0">
-                    <a:solidFill>
-                      <a:srgbClr val="0F6E56"/>
-                    </a:solidFill>
+                  <a:rPr lang="en-US" altLang="ko-KR" sz="1200" dirty="0">
                     <a:latin typeface="맑은 고딕" panose="020B0503020000020004" pitchFamily="50" charset="-127"/>
-                    <a:ea typeface="맑은 고딕" panose="020B0503020000020004" pitchFamily="50" charset="-127"/>
                     <a:cs typeface="Calibri" pitchFamily="34" charset="-120"/>
                   </a:rPr>
-                  <a:t>  </a:t>
+                  <a:t>ATC </a:t>
                 </a:r>
                 <a:r>
                   <a:rPr lang="ko-KR" altLang="en-US" sz="1200" dirty="0">
-                    <a:solidFill>
-                      <a:srgbClr val="363636"/>
-                    </a:solidFill>
                     <a:latin typeface="맑은 고딕" panose="020B0503020000020004" pitchFamily="50" charset="-127"/>
-                    <a:ea typeface="맑은 고딕" panose="020B0503020000020004" pitchFamily="50" charset="-127"/>
                     <a:cs typeface="Calibri" pitchFamily="34" charset="-120"/>
                   </a:rPr>
-                  <a:t>처방 기간 타임라인에 따라</a:t>
+                  <a:t>코드 기반 약물 계통 자동 분류</a:t>
                 </a:r>
-                <a:r>
-                  <a:rPr lang="en-US" altLang="ko-KR" sz="1200" dirty="0">
-                    <a:solidFill>
-                      <a:srgbClr val="363636"/>
-                    </a:solidFill>
-                    <a:latin typeface="맑은 고딕" panose="020B0503020000020004" pitchFamily="50" charset="-127"/>
-                    <a:ea typeface="맑은 고딕" panose="020B0503020000020004" pitchFamily="50" charset="-127"/>
-                    <a:cs typeface="Calibri" pitchFamily="34" charset="-120"/>
-                  </a:rPr>
-                  <a:t>, </a:t>
-                </a:r>
-                <a:r>
-                  <a:rPr lang="ko-KR" altLang="en-US" sz="1200" dirty="0">
-                    <a:solidFill>
-                      <a:srgbClr val="363636"/>
-                    </a:solidFill>
-                    <a:latin typeface="맑은 고딕" panose="020B0503020000020004" pitchFamily="50" charset="-127"/>
-                    <a:ea typeface="맑은 고딕" panose="020B0503020000020004" pitchFamily="50" charset="-127"/>
-                    <a:cs typeface="Calibri" pitchFamily="34" charset="-120"/>
-                  </a:rPr>
-                  <a:t>동시 복용 약물 파악</a:t>
-                </a:r>
-                <a:endParaRPr lang="en-US" sz="1200" dirty="0">
-                  <a:latin typeface="맑은 고딕" panose="020B0503020000020004" pitchFamily="50" charset="-127"/>
-                </a:endParaRPr>
               </a:p>
             </p:txBody>
           </p:sp>
@@ -2359,29 +2303,7 @@
                     <a:ea typeface="맑은 고딕" panose="020B0503020000020004" pitchFamily="50" charset="-127"/>
                     <a:cs typeface="Calibri" pitchFamily="34" charset="-120"/>
                   </a:rPr>
-                  <a:t>DDI(</a:t>
-                </a:r>
-                <a:r>
-                  <a:rPr lang="ko-KR" altLang="en-US" sz="1200" dirty="0">
-                    <a:solidFill>
-                      <a:srgbClr val="363636"/>
-                    </a:solidFill>
-                    <a:latin typeface="맑은 고딕" panose="020B0503020000020004" pitchFamily="50" charset="-127"/>
-                    <a:ea typeface="맑은 고딕" panose="020B0503020000020004" pitchFamily="50" charset="-127"/>
-                    <a:cs typeface="Calibri" pitchFamily="34" charset="-120"/>
-                  </a:rPr>
-                  <a:t>약물 상호작용</a:t>
-                </a:r>
-                <a:r>
-                  <a:rPr lang="en-US" altLang="ko-KR" sz="1200" dirty="0">
-                    <a:solidFill>
-                      <a:srgbClr val="363636"/>
-                    </a:solidFill>
-                    <a:latin typeface="맑은 고딕" panose="020B0503020000020004" pitchFamily="50" charset="-127"/>
-                    <a:ea typeface="맑은 고딕" panose="020B0503020000020004" pitchFamily="50" charset="-127"/>
-                    <a:cs typeface="Calibri" pitchFamily="34" charset="-120"/>
-                  </a:rPr>
-                  <a:t>)</a:t>
+                  <a:t>DDI</a:t>
                 </a:r>
                 <a:r>
                   <a:rPr lang="ko-KR" altLang="en-US" sz="1200" dirty="0">
@@ -2622,20 +2544,12 @@
                     <a:buNone/>
                   </a:pPr>
                   <a:r>
-                    <a:rPr lang="en-US" b="1" dirty="0">
-                      <a:solidFill>
-                        <a:schemeClr val="bg1"/>
-                      </a:solidFill>
-                    </a:rPr>
-                    <a:t>DUR </a:t>
-                  </a:r>
-                  <a:r>
                     <a:rPr lang="ko-KR" altLang="en-US" b="1" dirty="0">
                       <a:solidFill>
                         <a:schemeClr val="bg1"/>
                       </a:solidFill>
                     </a:rPr>
-                    <a:t>내역 클릭</a:t>
+                    <a:t>내원 환자 내역 클릭</a:t>
                   </a:r>
                   <a:endParaRPr lang="en-US" b="1" dirty="0">
                     <a:solidFill>
@@ -2679,6 +2593,17 @@
                     <a:buNone/>
                   </a:pPr>
                   <a:r>
+                    <a:rPr lang="en-US" altLang="ko-KR" sz="1100" dirty="0">
+                      <a:solidFill>
+                        <a:srgbClr val="363636"/>
+                      </a:solidFill>
+                      <a:latin typeface="맑은 고딕" panose="020B0503020000020004" pitchFamily="50" charset="-127"/>
+                      <a:ea typeface="맑은 고딕" panose="020B0503020000020004" pitchFamily="50" charset="-127"/>
+                      <a:cs typeface="Calibri" pitchFamily="34" charset="-120"/>
+                    </a:rPr>
+                    <a:t>‘</a:t>
+                  </a:r>
+                  <a:r>
                     <a:rPr lang="ko-KR" altLang="en-US" sz="1100" dirty="0" err="1">
                       <a:solidFill>
                         <a:srgbClr val="363636"/>
@@ -2690,6 +2615,17 @@
                     <a:t>카우누리</a:t>
                   </a:r>
                   <a:r>
+                    <a:rPr lang="en-US" altLang="ko-KR" sz="1100" dirty="0">
+                      <a:solidFill>
+                        <a:srgbClr val="363636"/>
+                      </a:solidFill>
+                      <a:latin typeface="맑은 고딕" panose="020B0503020000020004" pitchFamily="50" charset="-127"/>
+                      <a:ea typeface="맑은 고딕" panose="020B0503020000020004" pitchFamily="50" charset="-127"/>
+                      <a:cs typeface="Calibri" pitchFamily="34" charset="-120"/>
+                    </a:rPr>
+                    <a:t>’</a:t>
+                  </a:r>
+                  <a:r>
                     <a:rPr lang="ko-KR" altLang="en-US" sz="1100" dirty="0">
                       <a:solidFill>
                         <a:srgbClr val="363636"/>
@@ -2698,35 +2634,13 @@
                       <a:ea typeface="맑은 고딕" panose="020B0503020000020004" pitchFamily="50" charset="-127"/>
                       <a:cs typeface="Calibri" pitchFamily="34" charset="-120"/>
                     </a:rPr>
-                    <a:t> 내</a:t>
-                  </a:r>
-                  <a:endParaRPr lang="en-US" altLang="ko-KR" sz="1100" dirty="0">
-                    <a:solidFill>
-                      <a:srgbClr val="363636"/>
-                    </a:solidFill>
-                    <a:latin typeface="맑은 고딕" panose="020B0503020000020004" pitchFamily="50" charset="-127"/>
-                    <a:ea typeface="맑은 고딕" panose="020B0503020000020004" pitchFamily="50" charset="-127"/>
-                    <a:cs typeface="Calibri" pitchFamily="34" charset="-120"/>
-                  </a:endParaRPr>
-                </a:p>
-                <a:p>
-                  <a:pPr marL="0" indent="0" algn="ctr">
-                    <a:lnSpc>
-                      <a:spcPct val="150000"/>
-                    </a:lnSpc>
-                    <a:buNone/>
-                  </a:pPr>
-                  <a:r>
-                    <a:rPr lang="en-US" sz="1100" dirty="0">
-                      <a:latin typeface="맑은 고딕" panose="020B0503020000020004" pitchFamily="50" charset="-127"/>
-                    </a:rPr>
-                    <a:t>DUR </a:t>
+                    <a:t> </a:t>
                   </a:r>
                   <a:r>
                     <a:rPr lang="ko-KR" altLang="en-US" sz="1100" dirty="0">
                       <a:latin typeface="맑은 고딕" panose="020B0503020000020004" pitchFamily="50" charset="-127"/>
                     </a:rPr>
-                    <a:t>시스템 화면에서</a:t>
+                    <a:t>화면에서</a:t>
                   </a:r>
                   <a:endParaRPr lang="en-US" altLang="ko-KR" sz="1100" dirty="0">
                     <a:latin typeface="맑은 고딕" panose="020B0503020000020004" pitchFamily="50" charset="-127"/>
@@ -2743,7 +2657,7 @@
                     <a:rPr lang="ko-KR" altLang="en-US" sz="1100" dirty="0">
                       <a:latin typeface="맑은 고딕" panose="020B0503020000020004" pitchFamily="50" charset="-127"/>
                     </a:rPr>
-                    <a:t>원하는 약 처방 내역 선택</a:t>
+                    <a:t>내원한 환자 선택</a:t>
                   </a:r>
                   <a:endParaRPr lang="en-US" sz="1100" dirty="0">
                     <a:latin typeface="맑은 고딕" panose="020B0503020000020004" pitchFamily="50" charset="-127"/>
@@ -3133,8 +3047,8 @@
               </p:nvSpPr>
               <p:spPr>
                 <a:xfrm>
-                  <a:off x="5032586" y="4257379"/>
-                  <a:ext cx="2194560" cy="411480"/>
+                  <a:off x="5032586" y="4236747"/>
+                  <a:ext cx="2194560" cy="464238"/>
                 </a:xfrm>
                 <a:prstGeom prst="rect">
                   <a:avLst/>
@@ -3149,6 +3063,13 @@
                   <a:prstDash val="solid"/>
                 </a:ln>
               </p:spPr>
+              <p:txBody>
+                <a:bodyPr/>
+                <a:lstStyle/>
+                <a:p>
+                  <a:endParaRPr lang="ko-KR" altLang="en-US" dirty="0"/>
+                </a:p>
+              </p:txBody>
             </p:sp>
           </p:grpSp>
           <p:sp>
@@ -3398,7 +3319,7 @@
                     <a:ea typeface="맑은 고딕" panose="020B0503020000020004" pitchFamily="50" charset="-127"/>
                     <a:cs typeface="Calibri" pitchFamily="34" charset="-120"/>
                   </a:rPr>
-                  <a:t>처방 이력 분석</a:t>
+                  <a:t>처방 이력 조회</a:t>
                 </a:r>
                 <a:endParaRPr lang="en-US" dirty="0">
                   <a:latin typeface="맑은 고딕" panose="020B0503020000020004" pitchFamily="50" charset="-127"/>
@@ -3439,79 +3360,14 @@
                   </a:lnSpc>
                 </a:pPr>
                 <a:r>
-                  <a:rPr lang="en-US" sz="1100" dirty="0">
-                    <a:solidFill>
-                      <a:srgbClr val="363636"/>
-                    </a:solidFill>
-                    <a:latin typeface="맑은 고딕" panose="020B0503020000020004" pitchFamily="50" charset="-127"/>
-                    <a:ea typeface="맑은 고딕" panose="020B0503020000020004" pitchFamily="50" charset="-127"/>
-                    <a:cs typeface="Calibri" pitchFamily="34" charset="-120"/>
-                  </a:rPr>
-                  <a:t>AI</a:t>
-                </a:r>
-                <a:r>
                   <a:rPr lang="ko-KR" altLang="en-US" sz="1100" dirty="0">
-                    <a:solidFill>
-                      <a:srgbClr val="363636"/>
-                    </a:solidFill>
-                    <a:latin typeface="맑은 고딕" panose="020B0503020000020004" pitchFamily="50" charset="-127"/>
-                    <a:ea typeface="맑은 고딕" panose="020B0503020000020004" pitchFamily="50" charset="-127"/>
-                    <a:cs typeface="Calibri" pitchFamily="34" charset="-120"/>
-                  </a:rPr>
-                  <a:t>가 계통 </a:t>
-                </a:r>
-                <a:r>
-                  <a:rPr lang="en-US" altLang="ko-KR" sz="1100" dirty="0">
                     <a:solidFill>
                       <a:srgbClr val="363636"/>
                     </a:solidFill>
                     <a:latin typeface="맑은 고딕" panose="020B0503020000020004" pitchFamily="50" charset="-127"/>
                     <a:cs typeface="Calibri" pitchFamily="34" charset="-120"/>
                   </a:rPr>
-                  <a:t>· </a:t>
-                </a:r>
-                <a:r>
-                  <a:rPr lang="ko-KR" altLang="en-US" sz="1100" dirty="0">
-                    <a:solidFill>
-                      <a:srgbClr val="363636"/>
-                    </a:solidFill>
-                    <a:latin typeface="맑은 고딕" panose="020B0503020000020004" pitchFamily="50" charset="-127"/>
-                    <a:ea typeface="맑은 고딕" panose="020B0503020000020004" pitchFamily="50" charset="-127"/>
-                    <a:cs typeface="Calibri" pitchFamily="34" charset="-120"/>
-                  </a:rPr>
-                  <a:t>기간 </a:t>
-                </a:r>
-                <a:r>
-                  <a:rPr lang="en-US" altLang="ko-KR" sz="1100" dirty="0">
-                    <a:solidFill>
-                      <a:srgbClr val="363636"/>
-                    </a:solidFill>
-                    <a:latin typeface="맑은 고딕" panose="020B0503020000020004" pitchFamily="50" charset="-127"/>
-                    <a:cs typeface="Calibri" pitchFamily="34" charset="-120"/>
-                  </a:rPr>
-                  <a:t>· </a:t>
-                </a:r>
-                <a:r>
-                  <a:rPr lang="ko-KR" altLang="en-US" sz="1100" dirty="0" err="1">
-                    <a:solidFill>
-                      <a:srgbClr val="363636"/>
-                    </a:solidFill>
-                    <a:latin typeface="맑은 고딕" panose="020B0503020000020004" pitchFamily="50" charset="-127"/>
-                    <a:ea typeface="맑은 고딕" panose="020B0503020000020004" pitchFamily="50" charset="-127"/>
-                    <a:cs typeface="Calibri" pitchFamily="34" charset="-120"/>
-                  </a:rPr>
-                  <a:t>용량별</a:t>
-                </a:r>
-                <a:r>
-                  <a:rPr lang="ko-KR" altLang="en-US" sz="1100" dirty="0">
-                    <a:solidFill>
-                      <a:srgbClr val="363636"/>
-                    </a:solidFill>
-                    <a:latin typeface="맑은 고딕" panose="020B0503020000020004" pitchFamily="50" charset="-127"/>
-                    <a:ea typeface="맑은 고딕" panose="020B0503020000020004" pitchFamily="50" charset="-127"/>
-                    <a:cs typeface="Calibri" pitchFamily="34" charset="-120"/>
-                  </a:rPr>
-                  <a:t> </a:t>
+                  <a:t>기간 및 진료 과 선택해</a:t>
                 </a:r>
                 <a:endParaRPr lang="en-US" altLang="ko-KR" sz="1100" dirty="0">
                   <a:solidFill>
@@ -3523,11 +3379,10 @@
                 </a:endParaRPr>
               </a:p>
               <a:p>
-                <a:pPr marL="0" indent="0" algn="ctr">
+                <a:pPr algn="ctr">
                   <a:lnSpc>
                     <a:spcPct val="150000"/>
                   </a:lnSpc>
-                  <a:buNone/>
                 </a:pPr>
                 <a:r>
                   <a:rPr lang="ko-KR" altLang="en-US" sz="1100" dirty="0">
@@ -3538,34 +3393,7 @@
                     <a:ea typeface="맑은 고딕" panose="020B0503020000020004" pitchFamily="50" charset="-127"/>
                     <a:cs typeface="Calibri" pitchFamily="34" charset="-120"/>
                   </a:rPr>
-                  <a:t>처방 이력 </a:t>
-                </a:r>
-                <a:endParaRPr lang="en-US" altLang="ko-KR" sz="1100" dirty="0">
-                  <a:solidFill>
-                    <a:srgbClr val="363636"/>
-                  </a:solidFill>
-                  <a:latin typeface="맑은 고딕" panose="020B0503020000020004" pitchFamily="50" charset="-127"/>
-                  <a:ea typeface="맑은 고딕" panose="020B0503020000020004" pitchFamily="50" charset="-127"/>
-                  <a:cs typeface="Calibri" pitchFamily="34" charset="-120"/>
-                </a:endParaRPr>
-              </a:p>
-              <a:p>
-                <a:pPr marL="0" indent="0" algn="ctr">
-                  <a:lnSpc>
-                    <a:spcPct val="150000"/>
-                  </a:lnSpc>
-                  <a:buNone/>
-                </a:pPr>
-                <a:r>
-                  <a:rPr lang="ko-KR" altLang="en-US" sz="1100" dirty="0">
-                    <a:solidFill>
-                      <a:srgbClr val="363636"/>
-                    </a:solidFill>
-                    <a:latin typeface="맑은 고딕" panose="020B0503020000020004" pitchFamily="50" charset="-127"/>
-                    <a:ea typeface="맑은 고딕" panose="020B0503020000020004" pitchFamily="50" charset="-127"/>
-                    <a:cs typeface="Calibri" pitchFamily="34" charset="-120"/>
-                  </a:rPr>
-                  <a:t>자동 분류 수행</a:t>
+                  <a:t>유사 증상 처방 이력 조회</a:t>
                 </a:r>
                 <a:endParaRPr lang="en-US" sz="1100" dirty="0">
                   <a:latin typeface="맑은 고딕" panose="020B0503020000020004" pitchFamily="50" charset="-127"/>
@@ -3587,9 +3415,9 @@
             </p:nvGrpSpPr>
             <p:grpSpPr>
               <a:xfrm>
-                <a:off x="8543161" y="3652939"/>
+                <a:off x="8545511" y="3683086"/>
                 <a:ext cx="2197693" cy="411480"/>
-                <a:chOff x="8550994" y="3676734"/>
+                <a:chOff x="8553344" y="3706881"/>
                 <a:chExt cx="2197693" cy="411480"/>
               </a:xfrm>
             </p:grpSpPr>
@@ -3607,7 +3435,7 @@
               </p:nvSpPr>
               <p:spPr>
                 <a:xfrm>
-                  <a:off x="8550994" y="3676734"/>
+                  <a:off x="8553344" y="3706881"/>
                   <a:ext cx="2194560" cy="411480"/>
                 </a:xfrm>
                 <a:prstGeom prst="rect">
@@ -3638,7 +3466,7 @@
               </p:nvSpPr>
               <p:spPr>
                 <a:xfrm>
-                  <a:off x="8554127" y="3714992"/>
+                  <a:off x="8556477" y="3745139"/>
                   <a:ext cx="2194560" cy="320432"/>
                 </a:xfrm>
                 <a:prstGeom prst="rect">
@@ -3656,11 +3484,17 @@
                   </a:pPr>
                   <a:r>
                     <a:rPr lang="ko-KR" altLang="en-US" sz="900" dirty="0">
+                      <a:solidFill>
+                        <a:srgbClr val="64748B"/>
+                      </a:solidFill>
                       <a:latin typeface="맑은 고딕" panose="020B0503020000020004" pitchFamily="50" charset="-127"/>
                     </a:rPr>
-                    <a:t>정리 및 분석을 통한 인사이트 제공</a:t>
+                    <a:t>추출을 통한 인사이트 제공</a:t>
                   </a:r>
                   <a:endParaRPr lang="en-US" sz="900" dirty="0">
+                    <a:solidFill>
+                      <a:srgbClr val="64748B"/>
+                    </a:solidFill>
                     <a:latin typeface="맑은 고딕" panose="020B0503020000020004" pitchFamily="50" charset="-127"/>
                   </a:endParaRPr>
                 </a:p>
@@ -3913,7 +3747,7 @@
                     <a:ea typeface="맑은 고딕" panose="020B0503020000020004" pitchFamily="50" charset="-127"/>
                     <a:cs typeface="Calibri" pitchFamily="34" charset="-120"/>
                   </a:rPr>
-                  <a:t>위험 알림 확인</a:t>
+                  <a:t>약물 정보 확인</a:t>
                 </a:r>
                 <a:endParaRPr lang="en-US" dirty="0">
                   <a:latin typeface="맑은 고딕" panose="020B0503020000020004" pitchFamily="50" charset="-127"/>
@@ -3958,7 +3792,43 @@
                   <a:rPr lang="ko-KR" altLang="en-US" sz="1100" dirty="0">
                     <a:latin typeface="맑은 고딕" panose="020B0503020000020004" pitchFamily="50" charset="-127"/>
                   </a:rPr>
-                  <a:t>중복 및 상호작용</a:t>
+                  <a:t>계통</a:t>
+                </a:r>
+                <a:r>
+                  <a:rPr lang="en-US" altLang="ko-KR" sz="1100" dirty="0">
+                    <a:latin typeface="맑은 고딕" panose="020B0503020000020004" pitchFamily="50" charset="-127"/>
+                  </a:rPr>
+                  <a:t>, </a:t>
+                </a:r>
+                <a:r>
+                  <a:rPr lang="ko-KR" altLang="en-US" sz="1100" dirty="0">
+                    <a:latin typeface="맑은 고딕" panose="020B0503020000020004" pitchFamily="50" charset="-127"/>
+                  </a:rPr>
+                  <a:t>처방 기간</a:t>
+                </a:r>
+                <a:r>
+                  <a:rPr lang="en-US" altLang="ko-KR" sz="1100" dirty="0">
+                    <a:latin typeface="맑은 고딕" panose="020B0503020000020004" pitchFamily="50" charset="-127"/>
+                  </a:rPr>
+                  <a:t>, </a:t>
+                </a:r>
+                <a:r>
+                  <a:rPr lang="ko-KR" altLang="en-US" sz="1100" dirty="0">
+                    <a:latin typeface="맑은 고딕" panose="020B0503020000020004" pitchFamily="50" charset="-127"/>
+                  </a:rPr>
+                  <a:t>용량</a:t>
+                </a:r>
+                <a:r>
+                  <a:rPr lang="en-US" altLang="ko-KR" sz="1100" dirty="0">
+                    <a:latin typeface="맑은 고딕" panose="020B0503020000020004" pitchFamily="50" charset="-127"/>
+                  </a:rPr>
+                  <a:t>, </a:t>
+                </a:r>
+                <a:r>
+                  <a:rPr lang="ko-KR" altLang="en-US" sz="1100" dirty="0">
+                    <a:latin typeface="맑은 고딕" panose="020B0503020000020004" pitchFamily="50" charset="-127"/>
+                  </a:rPr>
+                  <a:t>상태 등</a:t>
                 </a:r>
                 <a:endParaRPr lang="en-US" altLang="ko-KR" sz="1100" dirty="0">
                   <a:latin typeface="맑은 고딕" panose="020B0503020000020004" pitchFamily="50" charset="-127"/>
@@ -3974,47 +3844,15 @@
                 <a:r>
                   <a:rPr lang="ko-KR" altLang="en-US" sz="1100" dirty="0">
                     <a:latin typeface="맑은 고딕" panose="020B0503020000020004" pitchFamily="50" charset="-127"/>
-                    <a:ea typeface="맑은 고딕" panose="020B0503020000020004" pitchFamily="50" charset="-127"/>
                   </a:rPr>
-                  <a:t>위험 약물 강조 표시</a:t>
-                </a:r>
-                <a:endParaRPr lang="en-US" altLang="ko-KR" sz="1100" dirty="0">
-                  <a:latin typeface="맑은 고딕" panose="020B0503020000020004" pitchFamily="50" charset="-127"/>
-                  <a:ea typeface="맑은 고딕" panose="020B0503020000020004" pitchFamily="50" charset="-127"/>
-                </a:endParaRPr>
-              </a:p>
-              <a:p>
-                <a:pPr marL="0" indent="0" algn="ctr">
-                  <a:lnSpc>
-                    <a:spcPct val="150000"/>
-                  </a:lnSpc>
-                  <a:buNone/>
-                </a:pPr>
-                <a:r>
-                  <a:rPr lang="ko-KR" altLang="en-US" sz="1100" dirty="0">
-                    <a:latin typeface="맑은 고딕" panose="020B0503020000020004" pitchFamily="50" charset="-127"/>
-                    <a:ea typeface="맑은 고딕" panose="020B0503020000020004" pitchFamily="50" charset="-127"/>
-                  </a:rPr>
-                  <a:t>및</a:t>
+                  <a:t>정보 확인</a:t>
                 </a:r>
                 <a:r>
                   <a:rPr lang="en-US" altLang="ko-KR" sz="1100" dirty="0">
                     <a:latin typeface="맑은 고딕" panose="020B0503020000020004" pitchFamily="50" charset="-127"/>
-                    <a:ea typeface="맑은 고딕" panose="020B0503020000020004" pitchFamily="50" charset="-127"/>
                   </a:rPr>
                   <a:t> </a:t>
                 </a:r>
-                <a:r>
-                  <a:rPr lang="ko-KR" altLang="en-US" sz="1100" dirty="0">
-                    <a:latin typeface="맑은 고딕" panose="020B0503020000020004" pitchFamily="50" charset="-127"/>
-                    <a:ea typeface="맑은 고딕" panose="020B0503020000020004" pitchFamily="50" charset="-127"/>
-                  </a:rPr>
-                  <a:t>경고 안내</a:t>
-                </a:r>
-                <a:endParaRPr lang="en-US" altLang="ko-KR" sz="1100" dirty="0">
-                  <a:latin typeface="맑은 고딕" panose="020B0503020000020004" pitchFamily="50" charset="-127"/>
-                  <a:ea typeface="맑은 고딕" panose="020B0503020000020004" pitchFamily="50" charset="-127"/>
-                </a:endParaRPr>
               </a:p>
             </p:txBody>
           </p:sp>
@@ -4032,9 +3870,9 @@
             </p:nvGrpSpPr>
             <p:grpSpPr>
               <a:xfrm>
-                <a:off x="8543161" y="3652939"/>
+                <a:off x="8543161" y="3680182"/>
                 <a:ext cx="2197693" cy="411480"/>
-                <a:chOff x="8550994" y="3676734"/>
+                <a:chOff x="8550994" y="3703977"/>
                 <a:chExt cx="2197693" cy="411480"/>
               </a:xfrm>
             </p:grpSpPr>
@@ -4052,7 +3890,7 @@
               </p:nvSpPr>
               <p:spPr>
                 <a:xfrm>
-                  <a:off x="8550994" y="3676734"/>
+                  <a:off x="8550994" y="3703977"/>
                   <a:ext cx="2194560" cy="411480"/>
                 </a:xfrm>
                 <a:prstGeom prst="rect">
@@ -4083,7 +3921,7 @@
               </p:nvSpPr>
               <p:spPr>
                 <a:xfrm>
-                  <a:off x="8554127" y="3714992"/>
+                  <a:off x="8554127" y="3742235"/>
                   <a:ext cx="2194560" cy="320432"/>
                 </a:xfrm>
                 <a:prstGeom prst="rect">
@@ -4108,7 +3946,29 @@
                       <a:ea typeface="맑은 고딕" panose="020B0503020000020004" pitchFamily="50" charset="-127"/>
                       <a:cs typeface="Calibri" pitchFamily="34" charset="-120"/>
                     </a:rPr>
-                    <a:t>처방 검토 버튼으로 메모 가능</a:t>
+                    <a:t>주의사항에서 상호작용</a:t>
+                  </a:r>
+                  <a:r>
+                    <a:rPr lang="en-US" altLang="ko-KR" sz="900" dirty="0">
+                      <a:solidFill>
+                        <a:srgbClr val="64748B"/>
+                      </a:solidFill>
+                      <a:latin typeface="맑은 고딕" panose="020B0503020000020004" pitchFamily="50" charset="-127"/>
+                      <a:ea typeface="맑은 고딕" panose="020B0503020000020004" pitchFamily="50" charset="-127"/>
+                      <a:cs typeface="Calibri" pitchFamily="34" charset="-120"/>
+                    </a:rPr>
+                    <a:t>, </a:t>
+                  </a:r>
+                  <a:r>
+                    <a:rPr lang="ko-KR" altLang="en-US" sz="900" dirty="0">
+                      <a:solidFill>
+                        <a:srgbClr val="64748B"/>
+                      </a:solidFill>
+                      <a:latin typeface="맑은 고딕" panose="020B0503020000020004" pitchFamily="50" charset="-127"/>
+                      <a:ea typeface="맑은 고딕" panose="020B0503020000020004" pitchFamily="50" charset="-127"/>
+                      <a:cs typeface="Calibri" pitchFamily="34" charset="-120"/>
+                    </a:rPr>
+                    <a:t>다제약물 확인</a:t>
                   </a:r>
                   <a:endParaRPr lang="en-US" altLang="ko-KR" sz="900" dirty="0">
                     <a:solidFill>
@@ -4309,8 +4169,13 @@
             </a:r>
             <a:r>
               <a:rPr lang="ko-KR" altLang="en-US" dirty="0"/>
-              <a:t>팝업 창 인터페이스</a:t>
-            </a:r>
+              <a:t>팝업 창 인터페이스 </a:t>
+            </a:r>
+            <a:r>
+              <a:rPr lang="en-US" altLang="ko-KR" dirty="0"/>
+              <a:t>(1)</a:t>
+            </a:r>
+            <a:endParaRPr lang="ko-KR" altLang="en-US" dirty="0"/>
           </a:p>
         </p:txBody>
       </p:sp>
@@ -4328,7 +4193,7 @@
           </p:cNvPicPr>
           <p:nvPr/>
         </p:nvPicPr>
-        <p:blipFill rotWithShape="1">
+        <p:blipFill>
           <a:blip r:embed="rId2">
             <a:extLst>
               <a:ext uri="{28A0092B-C50C-407E-A947-70E740481C1C}">
@@ -4336,17 +4201,18 @@
               </a:ext>
             </a:extLst>
           </a:blip>
-          <a:srcRect t="-1" b="499"/>
-          <a:stretch/>
+          <a:stretch>
+            <a:fillRect/>
+          </a:stretch>
         </p:blipFill>
         <p:spPr>
           <a:xfrm>
-            <a:off x="2441010" y="922867"/>
-            <a:ext cx="4478477" cy="5232399"/>
+            <a:off x="2007279" y="1060016"/>
+            <a:ext cx="5051802" cy="4881516"/>
           </a:xfrm>
           <a:prstGeom prst="roundRect">
             <a:avLst>
-              <a:gd name="adj" fmla="val 2038"/>
+              <a:gd name="adj" fmla="val 1647"/>
             </a:avLst>
           </a:prstGeom>
           <a:ln>
@@ -4434,7 +4300,7 @@
         </p:nvSpPr>
         <p:spPr>
           <a:xfrm>
-            <a:off x="7142392" y="1389928"/>
+            <a:off x="7142392" y="1333747"/>
             <a:ext cx="1925407" cy="280975"/>
           </a:xfrm>
           <a:prstGeom prst="rect">
@@ -4470,7 +4336,7 @@
                 <a:ea typeface="맑은 고딕" panose="020B0503020000020004" pitchFamily="50" charset="-127"/>
                 <a:cs typeface="Calibri" pitchFamily="34" charset="-120"/>
               </a:rPr>
-              <a:t>약물 처방 종합 평가</a:t>
+              <a:t>환자 정보</a:t>
             </a:r>
             <a:endParaRPr lang="en-US" sz="1200" dirty="0">
               <a:latin typeface="맑은 고딕" panose="020B0503020000020004" pitchFamily="50" charset="-127"/>
@@ -4492,7 +4358,7 @@
         </p:nvSpPr>
         <p:spPr>
           <a:xfrm>
-            <a:off x="7142393" y="1648425"/>
+            <a:off x="7142393" y="1592244"/>
             <a:ext cx="3967480" cy="337170"/>
           </a:xfrm>
           <a:prstGeom prst="rect">
@@ -4517,10 +4383,10 @@
                 <a:ea typeface="맑은 고딕" panose="020B0503020000020004" pitchFamily="50" charset="-127"/>
                 <a:cs typeface="Calibri" pitchFamily="34" charset="-120"/>
               </a:rPr>
-              <a:t>아래 기준에 따라</a:t>
-            </a:r>
-            <a:r>
-              <a:rPr lang="en-US" altLang="ko-KR" sz="1200" dirty="0">
+              <a:t>내원한 환자 정보 및 </a:t>
+            </a:r>
+            <a:r>
+              <a:rPr lang="ko-KR" altLang="en-US" sz="1200" dirty="0" err="1">
                 <a:solidFill>
                   <a:srgbClr val="64748B"/>
                 </a:solidFill>
@@ -4528,7 +4394,7 @@
                 <a:ea typeface="맑은 고딕" panose="020B0503020000020004" pitchFamily="50" charset="-127"/>
                 <a:cs typeface="Calibri" pitchFamily="34" charset="-120"/>
               </a:rPr>
-              <a:t>, </a:t>
+              <a:t>주증상</a:t>
             </a:r>
             <a:r>
               <a:rPr lang="ko-KR" altLang="en-US" sz="1200" dirty="0">
@@ -4539,218 +4405,7 @@
                 <a:ea typeface="맑은 고딕" panose="020B0503020000020004" pitchFamily="50" charset="-127"/>
                 <a:cs typeface="Calibri" pitchFamily="34" charset="-120"/>
               </a:rPr>
-              <a:t>평가 후 정상</a:t>
-            </a:r>
-            <a:r>
-              <a:rPr lang="en-US" altLang="ko-KR" sz="1200" dirty="0">
-                <a:solidFill>
-                  <a:srgbClr val="64748B"/>
-                </a:solidFill>
-                <a:latin typeface="맑은 고딕" panose="020B0503020000020004" pitchFamily="50" charset="-127"/>
-                <a:ea typeface="맑은 고딕" panose="020B0503020000020004" pitchFamily="50" charset="-127"/>
-                <a:cs typeface="Calibri" pitchFamily="34" charset="-120"/>
-              </a:rPr>
-              <a:t>/</a:t>
-            </a:r>
-            <a:r>
-              <a:rPr lang="ko-KR" altLang="en-US" sz="1200" dirty="0">
-                <a:solidFill>
-                  <a:srgbClr val="64748B"/>
-                </a:solidFill>
-                <a:latin typeface="맑은 고딕" panose="020B0503020000020004" pitchFamily="50" charset="-127"/>
-                <a:ea typeface="맑은 고딕" panose="020B0503020000020004" pitchFamily="50" charset="-127"/>
-                <a:cs typeface="Calibri" pitchFamily="34" charset="-120"/>
-              </a:rPr>
-              <a:t>주의</a:t>
-            </a:r>
-            <a:r>
-              <a:rPr lang="en-US" altLang="ko-KR" sz="1200" dirty="0">
-                <a:solidFill>
-                  <a:srgbClr val="64748B"/>
-                </a:solidFill>
-                <a:latin typeface="맑은 고딕" panose="020B0503020000020004" pitchFamily="50" charset="-127"/>
-                <a:ea typeface="맑은 고딕" panose="020B0503020000020004" pitchFamily="50" charset="-127"/>
-                <a:cs typeface="Calibri" pitchFamily="34" charset="-120"/>
-              </a:rPr>
-              <a:t>/</a:t>
-            </a:r>
-            <a:r>
-              <a:rPr lang="ko-KR" altLang="en-US" sz="1200" dirty="0">
-                <a:solidFill>
-                  <a:srgbClr val="64748B"/>
-                </a:solidFill>
-                <a:latin typeface="맑은 고딕" panose="020B0503020000020004" pitchFamily="50" charset="-127"/>
-                <a:ea typeface="맑은 고딕" panose="020B0503020000020004" pitchFamily="50" charset="-127"/>
-                <a:cs typeface="Calibri" pitchFamily="34" charset="-120"/>
-              </a:rPr>
-              <a:t>금기로 분류</a:t>
-            </a:r>
-            <a:endParaRPr lang="en-US" sz="1200" dirty="0">
-              <a:latin typeface="맑은 고딕" panose="020B0503020000020004" pitchFamily="50" charset="-127"/>
-            </a:endParaRPr>
-          </a:p>
-        </p:txBody>
-      </p:sp>
-      <p:sp>
-        <p:nvSpPr>
-          <p:cNvPr id="9" name="Shape 34">
-            <a:extLst>
-              <a:ext uri="{FF2B5EF4-FFF2-40B4-BE49-F238E27FC236}">
-                <a16:creationId xmlns:a16="http://schemas.microsoft.com/office/drawing/2014/main" id="{297E6674-D304-4C5F-8F74-CDB79611BB5E}"/>
-              </a:ext>
-            </a:extLst>
-          </p:cNvPr>
-          <p:cNvSpPr/>
-          <p:nvPr/>
-        </p:nvSpPr>
-        <p:spPr>
-          <a:xfrm>
-            <a:off x="6756818" y="2185058"/>
-            <a:ext cx="111760" cy="112390"/>
-          </a:xfrm>
-          <a:prstGeom prst="line">
-            <a:avLst/>
-          </a:prstGeom>
-          <a:solidFill>
-            <a:srgbClr val="EF9F27"/>
-          </a:solidFill>
-          <a:ln w="12700">
-            <a:solidFill>
-              <a:srgbClr val="EF9F27"/>
-            </a:solidFill>
-            <a:prstDash val="solid"/>
-          </a:ln>
-        </p:spPr>
-      </p:sp>
-      <p:sp>
-        <p:nvSpPr>
-          <p:cNvPr id="10" name="Shape 35">
-            <a:extLst>
-              <a:ext uri="{FF2B5EF4-FFF2-40B4-BE49-F238E27FC236}">
-                <a16:creationId xmlns:a16="http://schemas.microsoft.com/office/drawing/2014/main" id="{2B87788E-EEDD-479E-BA8F-5806EC753F7F}"/>
-              </a:ext>
-            </a:extLst>
-          </p:cNvPr>
-          <p:cNvSpPr/>
-          <p:nvPr/>
-        </p:nvSpPr>
-        <p:spPr>
-          <a:xfrm>
-            <a:off x="6857402" y="2230014"/>
-            <a:ext cx="279400" cy="22478"/>
-          </a:xfrm>
-          <a:prstGeom prst="rect">
-            <a:avLst/>
-          </a:prstGeom>
-          <a:solidFill>
-            <a:srgbClr val="EF9F27"/>
-          </a:solidFill>
-          <a:ln w="12700">
-            <a:solidFill>
-              <a:srgbClr val="EF9F27"/>
-            </a:solidFill>
-            <a:prstDash val="solid"/>
-          </a:ln>
-        </p:spPr>
-      </p:sp>
-      <p:sp>
-        <p:nvSpPr>
-          <p:cNvPr id="11" name="Text 36">
-            <a:extLst>
-              <a:ext uri="{FF2B5EF4-FFF2-40B4-BE49-F238E27FC236}">
-                <a16:creationId xmlns:a16="http://schemas.microsoft.com/office/drawing/2014/main" id="{B24C2662-6B76-4D45-9B7B-6B9E93F94FEF}"/>
-              </a:ext>
-            </a:extLst>
-          </p:cNvPr>
-          <p:cNvSpPr/>
-          <p:nvPr/>
-        </p:nvSpPr>
-        <p:spPr>
-          <a:xfrm>
-            <a:off x="7153567" y="2106802"/>
-            <a:ext cx="1229360" cy="280975"/>
-          </a:xfrm>
-          <a:prstGeom prst="rect">
-            <a:avLst/>
-          </a:prstGeom>
-          <a:noFill/>
-          <a:ln/>
-        </p:spPr>
-        <p:txBody>
-          <a:bodyPr wrap="square" rtlCol="0" anchor="ctr"/>
-          <a:lstStyle/>
-          <a:p>
-            <a:pPr marL="0" indent="0">
-              <a:buNone/>
-            </a:pPr>
-            <a:r>
-              <a:rPr lang="en-US" sz="1200" b="1" dirty="0">
-                <a:solidFill>
-                  <a:srgbClr val="0D2D6B"/>
-                </a:solidFill>
-                <a:latin typeface="맑은 고딕" panose="020B0503020000020004" pitchFamily="50" charset="-127"/>
-                <a:ea typeface="맑은 고딕" panose="020B0503020000020004" pitchFamily="50" charset="-127"/>
-                <a:cs typeface="Calibri" pitchFamily="34" charset="-120"/>
-              </a:rPr>
-              <a:t>② </a:t>
-            </a:r>
-            <a:r>
-              <a:rPr lang="ko-KR" altLang="en-US" sz="1200" b="1" dirty="0">
-                <a:solidFill>
-                  <a:srgbClr val="0D2D6B"/>
-                </a:solidFill>
-                <a:latin typeface="맑은 고딕" panose="020B0503020000020004" pitchFamily="50" charset="-127"/>
-                <a:ea typeface="맑은 고딕" panose="020B0503020000020004" pitchFamily="50" charset="-127"/>
-                <a:cs typeface="Calibri" pitchFamily="34" charset="-120"/>
-              </a:rPr>
-              <a:t>계통 분류</a:t>
-            </a:r>
-            <a:endParaRPr lang="en-US" sz="1200" dirty="0">
-              <a:latin typeface="맑은 고딕" panose="020B0503020000020004" pitchFamily="50" charset="-127"/>
-            </a:endParaRPr>
-          </a:p>
-        </p:txBody>
-      </p:sp>
-      <p:sp>
-        <p:nvSpPr>
-          <p:cNvPr id="12" name="Text 37">
-            <a:extLst>
-              <a:ext uri="{FF2B5EF4-FFF2-40B4-BE49-F238E27FC236}">
-                <a16:creationId xmlns:a16="http://schemas.microsoft.com/office/drawing/2014/main" id="{0B42FF27-C2DD-4D9C-9485-F659A2F0164E}"/>
-              </a:ext>
-            </a:extLst>
-          </p:cNvPr>
-          <p:cNvSpPr/>
-          <p:nvPr/>
-        </p:nvSpPr>
-        <p:spPr>
-          <a:xfrm>
-            <a:off x="7153567" y="2365299"/>
-            <a:ext cx="3967480" cy="337170"/>
-          </a:xfrm>
-          <a:prstGeom prst="rect">
-            <a:avLst/>
-          </a:prstGeom>
-          <a:noFill/>
-          <a:ln/>
-        </p:spPr>
-        <p:txBody>
-          <a:bodyPr wrap="square" rtlCol="0" anchor="ctr"/>
-          <a:lstStyle/>
-          <a:p>
-            <a:pPr marL="0" indent="0">
-              <a:buNone/>
-            </a:pPr>
-            <a:r>
-              <a:rPr lang="ko-KR" altLang="en-US" sz="1200" dirty="0">
-                <a:solidFill>
-                  <a:srgbClr val="64748B"/>
-                </a:solidFill>
-                <a:latin typeface="맑은 고딕" panose="020B0503020000020004" pitchFamily="50" charset="-127"/>
-                <a:ea typeface="맑은 고딕" panose="020B0503020000020004" pitchFamily="50" charset="-127"/>
-                <a:cs typeface="Calibri" pitchFamily="34" charset="-120"/>
-              </a:rPr>
-              <a:t>약물 계통 및 처방 내역 중 동일 계통 약물 표시</a:t>
+              <a:t> 및 진단명 표시</a:t>
             </a:r>
             <a:endParaRPr lang="en-US" sz="1200" dirty="0">
               <a:latin typeface="맑은 고딕" panose="020B0503020000020004" pitchFamily="50" charset="-127"/>
@@ -4772,7 +4427,7 @@
         </p:nvSpPr>
         <p:spPr>
           <a:xfrm>
-            <a:off x="6773584" y="2964865"/>
+            <a:off x="6784758" y="2582832"/>
             <a:ext cx="111760" cy="112390"/>
           </a:xfrm>
           <a:prstGeom prst="line">
@@ -4803,7 +4458,7 @@
         </p:nvSpPr>
         <p:spPr>
           <a:xfrm>
-            <a:off x="6874168" y="3009821"/>
+            <a:off x="6885342" y="2627788"/>
             <a:ext cx="279400" cy="22478"/>
           </a:xfrm>
           <a:prstGeom prst="rect">
@@ -4834,8 +4489,8 @@
         </p:nvSpPr>
         <p:spPr>
           <a:xfrm>
-            <a:off x="7142392" y="2900353"/>
-            <a:ext cx="1646007" cy="280975"/>
+            <a:off x="7164741" y="2414247"/>
+            <a:ext cx="2337567" cy="280975"/>
           </a:xfrm>
           <a:prstGeom prst="rect">
             <a:avLst/>
@@ -4847,9 +4502,16 @@
           <a:bodyPr wrap="square" rtlCol="0" anchor="ctr"/>
           <a:lstStyle/>
           <a:p>
-            <a:pPr marL="0" indent="0">
-              <a:buNone/>
-            </a:pPr>
+            <a:r>
+              <a:rPr lang="en-US" altLang="ko-KR" sz="1200" b="1" dirty="0">
+                <a:solidFill>
+                  <a:srgbClr val="0D2D6B"/>
+                </a:solidFill>
+                <a:latin typeface="맑은 고딕" panose="020B0503020000020004" pitchFamily="50" charset="-127"/>
+                <a:cs typeface="Calibri" pitchFamily="34" charset="-120"/>
+              </a:rPr>
+              <a:t>②</a:t>
+            </a:r>
             <a:r>
               <a:rPr lang="en-US" sz="1200" b="1" dirty="0">
                 <a:solidFill>
@@ -4859,7 +4521,7 @@
                 <a:ea typeface="맑은 고딕" panose="020B0503020000020004" pitchFamily="50" charset="-127"/>
                 <a:cs typeface="Calibri" pitchFamily="34" charset="-120"/>
               </a:rPr>
-              <a:t>③ </a:t>
+              <a:t> </a:t>
             </a:r>
             <a:r>
               <a:rPr lang="ko-KR" altLang="en-US" sz="1200" b="1" dirty="0">
@@ -4870,7 +4532,7 @@
                 <a:ea typeface="맑은 고딕" panose="020B0503020000020004" pitchFamily="50" charset="-127"/>
                 <a:cs typeface="Calibri" pitchFamily="34" charset="-120"/>
               </a:rPr>
-              <a:t>기간 〮 병용 현황</a:t>
+              <a:t>유사 증상 처방 이력 조회</a:t>
             </a:r>
             <a:endParaRPr lang="en-US" sz="1200" dirty="0">
               <a:latin typeface="맑은 고딕" panose="020B0503020000020004" pitchFamily="50" charset="-127"/>
@@ -4892,7 +4554,7 @@
         </p:nvSpPr>
         <p:spPr>
           <a:xfrm>
-            <a:off x="7142393" y="3158850"/>
+            <a:off x="7164741" y="2703330"/>
             <a:ext cx="3967480" cy="337170"/>
           </a:xfrm>
           <a:prstGeom prst="rect">
@@ -4917,7 +4579,51 @@
                 <a:ea typeface="맑은 고딕" panose="020B0503020000020004" pitchFamily="50" charset="-127"/>
                 <a:cs typeface="Calibri" pitchFamily="34" charset="-120"/>
               </a:rPr>
-              <a:t>약물 처방 기간 및 병용 약물 표시</a:t>
+              <a:t>기간</a:t>
+            </a:r>
+            <a:r>
+              <a:rPr lang="en-US" altLang="ko-KR" sz="1200" dirty="0">
+                <a:solidFill>
+                  <a:srgbClr val="64748B"/>
+                </a:solidFill>
+                <a:latin typeface="맑은 고딕" panose="020B0503020000020004" pitchFamily="50" charset="-127"/>
+                <a:ea typeface="맑은 고딕" panose="020B0503020000020004" pitchFamily="50" charset="-127"/>
+                <a:cs typeface="Calibri" pitchFamily="34" charset="-120"/>
+              </a:rPr>
+              <a:t> </a:t>
+            </a:r>
+            <a:r>
+              <a:rPr lang="ko-KR" altLang="en-US" sz="1200" dirty="0">
+                <a:solidFill>
+                  <a:srgbClr val="64748B"/>
+                </a:solidFill>
+                <a:latin typeface="맑은 고딕" panose="020B0503020000020004" pitchFamily="50" charset="-127"/>
+                <a:ea typeface="맑은 고딕" panose="020B0503020000020004" pitchFamily="50" charset="-127"/>
+                <a:cs typeface="Calibri" pitchFamily="34" charset="-120"/>
+              </a:rPr>
+              <a:t>및</a:t>
+            </a:r>
+            <a:r>
+              <a:rPr lang="en-US" altLang="ko-KR" sz="1200" dirty="0">
+                <a:solidFill>
+                  <a:srgbClr val="64748B"/>
+                </a:solidFill>
+                <a:latin typeface="맑은 고딕" panose="020B0503020000020004" pitchFamily="50" charset="-127"/>
+                <a:ea typeface="맑은 고딕" panose="020B0503020000020004" pitchFamily="50" charset="-127"/>
+                <a:cs typeface="Calibri" pitchFamily="34" charset="-120"/>
+              </a:rPr>
+              <a:t> </a:t>
+            </a:r>
+            <a:r>
+              <a:rPr lang="ko-KR" altLang="en-US" sz="1200" dirty="0">
+                <a:solidFill>
+                  <a:srgbClr val="64748B"/>
+                </a:solidFill>
+                <a:latin typeface="맑은 고딕" panose="020B0503020000020004" pitchFamily="50" charset="-127"/>
+                <a:ea typeface="맑은 고딕" panose="020B0503020000020004" pitchFamily="50" charset="-127"/>
+                <a:cs typeface="Calibri" pitchFamily="34" charset="-120"/>
+              </a:rPr>
+              <a:t>진료과로 필터링해</a:t>
             </a:r>
             <a:r>
               <a:rPr lang="en-US" altLang="ko-KR" sz="1200" dirty="0">
@@ -4939,7 +4645,18 @@
                 <a:ea typeface="맑은 고딕" panose="020B0503020000020004" pitchFamily="50" charset="-127"/>
                 <a:cs typeface="Calibri" pitchFamily="34" charset="-120"/>
               </a:rPr>
-              <a:t>적절성 판단</a:t>
+              <a:t>과거 처방 이력 확인</a:t>
+            </a:r>
+            <a:r>
+              <a:rPr lang="en-US" altLang="ko-KR" sz="1200" dirty="0">
+                <a:solidFill>
+                  <a:srgbClr val="64748B"/>
+                </a:solidFill>
+                <a:latin typeface="맑은 고딕" panose="020B0503020000020004" pitchFamily="50" charset="-127"/>
+                <a:ea typeface="맑은 고딕" panose="020B0503020000020004" pitchFamily="50" charset="-127"/>
+                <a:cs typeface="Calibri" pitchFamily="34" charset="-120"/>
+              </a:rPr>
+              <a:t> </a:t>
             </a:r>
             <a:endParaRPr lang="en-US" sz="1200" dirty="0">
               <a:latin typeface="맑은 고딕" panose="020B0503020000020004" pitchFamily="50" charset="-127"/>
@@ -4961,7 +4678,7 @@
         </p:nvSpPr>
         <p:spPr>
           <a:xfrm>
-            <a:off x="6762408" y="3780748"/>
+            <a:off x="6762408" y="3361429"/>
             <a:ext cx="111760" cy="112390"/>
           </a:xfrm>
           <a:prstGeom prst="line">
@@ -4992,7 +4709,7 @@
         </p:nvSpPr>
         <p:spPr>
           <a:xfrm>
-            <a:off x="6862992" y="3825701"/>
+            <a:off x="6862992" y="3406382"/>
             <a:ext cx="279400" cy="22478"/>
           </a:xfrm>
           <a:prstGeom prst="rect">
@@ -5023,8 +4740,73 @@
         </p:nvSpPr>
         <p:spPr>
           <a:xfrm>
-            <a:off x="7153567" y="3710711"/>
-            <a:ext cx="1229360" cy="280975"/>
+            <a:off x="7153567" y="3200427"/>
+            <a:ext cx="1575566" cy="280975"/>
+          </a:xfrm>
+          <a:prstGeom prst="rect">
+            <a:avLst/>
+          </a:prstGeom>
+          <a:noFill/>
+          <a:ln/>
+        </p:spPr>
+        <p:txBody>
+          <a:bodyPr wrap="square" rtlCol="0" anchor="ctr"/>
+          <a:lstStyle/>
+          <a:p>
+            <a:r>
+              <a:rPr lang="en-US" altLang="ko-KR" sz="1200" b="1" dirty="0">
+                <a:solidFill>
+                  <a:srgbClr val="0D2D6B"/>
+                </a:solidFill>
+                <a:latin typeface="맑은 고딕" panose="020B0503020000020004" pitchFamily="50" charset="-127"/>
+                <a:cs typeface="Calibri" pitchFamily="34" charset="-120"/>
+              </a:rPr>
+              <a:t>③</a:t>
+            </a:r>
+            <a:r>
+              <a:rPr lang="en-US" sz="1200" b="1" dirty="0">
+                <a:solidFill>
+                  <a:srgbClr val="0D2D6B"/>
+                </a:solidFill>
+                <a:latin typeface="맑은 고딕" panose="020B0503020000020004" pitchFamily="50" charset="-127"/>
+                <a:ea typeface="맑은 고딕" panose="020B0503020000020004" pitchFamily="50" charset="-127"/>
+                <a:cs typeface="Calibri" pitchFamily="34" charset="-120"/>
+              </a:rPr>
+              <a:t> </a:t>
+            </a:r>
+            <a:r>
+              <a:rPr lang="ko-KR" altLang="en-US" sz="1200" b="1" dirty="0">
+                <a:solidFill>
+                  <a:srgbClr val="0D2D6B"/>
+                </a:solidFill>
+                <a:latin typeface="맑은 고딕" panose="020B0503020000020004" pitchFamily="50" charset="-127"/>
+                <a:ea typeface="맑은 고딕" panose="020B0503020000020004" pitchFamily="50" charset="-127"/>
+                <a:cs typeface="Calibri" pitchFamily="34" charset="-120"/>
+              </a:rPr>
+              <a:t>처방 이력 확인</a:t>
+            </a:r>
+            <a:endParaRPr lang="en-US" sz="1200" dirty="0">
+              <a:latin typeface="맑은 고딕" panose="020B0503020000020004" pitchFamily="50" charset="-127"/>
+            </a:endParaRPr>
+          </a:p>
+        </p:txBody>
+      </p:sp>
+      <p:sp>
+        <p:nvSpPr>
+          <p:cNvPr id="20" name="Text 45">
+            <a:extLst>
+              <a:ext uri="{FF2B5EF4-FFF2-40B4-BE49-F238E27FC236}">
+                <a16:creationId xmlns:a16="http://schemas.microsoft.com/office/drawing/2014/main" id="{9503F9B2-72DF-4232-815D-7B523D73D0F7}"/>
+              </a:ext>
+            </a:extLst>
+          </p:cNvPr>
+          <p:cNvSpPr/>
+          <p:nvPr/>
+        </p:nvSpPr>
+        <p:spPr>
+          <a:xfrm>
+            <a:off x="7164742" y="3481402"/>
+            <a:ext cx="3367791" cy="337171"/>
           </a:xfrm>
           <a:prstGeom prst="rect">
             <a:avLst/>
@@ -5037,243 +4819,21 @@
           <a:lstStyle/>
           <a:p>
             <a:pPr marL="0" indent="0">
+              <a:lnSpc>
+                <a:spcPct val="150000"/>
+              </a:lnSpc>
               <a:buNone/>
             </a:pPr>
             <a:r>
-              <a:rPr lang="en-US" sz="1200" b="1" dirty="0">
-                <a:solidFill>
-                  <a:srgbClr val="0D2D6B"/>
+              <a:rPr lang="ko-KR" altLang="en-US" sz="1200" dirty="0">
+                <a:solidFill>
+                  <a:srgbClr val="64748B"/>
                 </a:solidFill>
                 <a:latin typeface="맑은 고딕" panose="020B0503020000020004" pitchFamily="50" charset="-127"/>
                 <a:ea typeface="맑은 고딕" panose="020B0503020000020004" pitchFamily="50" charset="-127"/>
                 <a:cs typeface="Calibri" pitchFamily="34" charset="-120"/>
               </a:rPr>
-              <a:t>④ </a:t>
-            </a:r>
-            <a:r>
-              <a:rPr lang="ko-KR" altLang="en-US" sz="1200" b="1" dirty="0">
-                <a:solidFill>
-                  <a:srgbClr val="0D2D6B"/>
-                </a:solidFill>
-                <a:latin typeface="맑은 고딕" panose="020B0503020000020004" pitchFamily="50" charset="-127"/>
-                <a:ea typeface="맑은 고딕" panose="020B0503020000020004" pitchFamily="50" charset="-127"/>
-                <a:cs typeface="Calibri" pitchFamily="34" charset="-120"/>
-              </a:rPr>
-              <a:t>용량 분석</a:t>
-            </a:r>
-            <a:endParaRPr lang="en-US" sz="1200" dirty="0">
-              <a:latin typeface="맑은 고딕" panose="020B0503020000020004" pitchFamily="50" charset="-127"/>
-            </a:endParaRPr>
-          </a:p>
-        </p:txBody>
-      </p:sp>
-      <p:sp>
-        <p:nvSpPr>
-          <p:cNvPr id="20" name="Text 45">
-            <a:extLst>
-              <a:ext uri="{FF2B5EF4-FFF2-40B4-BE49-F238E27FC236}">
-                <a16:creationId xmlns:a16="http://schemas.microsoft.com/office/drawing/2014/main" id="{9503F9B2-72DF-4232-815D-7B523D73D0F7}"/>
-              </a:ext>
-            </a:extLst>
-          </p:cNvPr>
-          <p:cNvSpPr/>
-          <p:nvPr/>
-        </p:nvSpPr>
-        <p:spPr>
-          <a:xfrm>
-            <a:off x="7153567" y="3969208"/>
-            <a:ext cx="3967480" cy="337170"/>
-          </a:xfrm>
-          <a:prstGeom prst="rect">
-            <a:avLst/>
-          </a:prstGeom>
-          <a:noFill/>
-          <a:ln/>
-        </p:spPr>
-        <p:txBody>
-          <a:bodyPr wrap="square" rtlCol="0" anchor="ctr"/>
-          <a:lstStyle/>
-          <a:p>
-            <a:pPr marL="0" indent="0">
-              <a:buNone/>
-            </a:pPr>
-            <a:r>
-              <a:rPr lang="ko-KR" altLang="en-US" sz="1200" dirty="0">
-                <a:solidFill>
-                  <a:srgbClr val="64748B"/>
-                </a:solidFill>
-                <a:latin typeface="맑은 고딕" panose="020B0503020000020004" pitchFamily="50" charset="-127"/>
-                <a:ea typeface="맑은 고딕" panose="020B0503020000020004" pitchFamily="50" charset="-127"/>
-                <a:cs typeface="Calibri" pitchFamily="34" charset="-120"/>
-              </a:rPr>
-              <a:t>약물 용량이 적절한 지 판단</a:t>
-            </a:r>
-            <a:endParaRPr lang="en-US" sz="1200" dirty="0">
-              <a:latin typeface="맑은 고딕" panose="020B0503020000020004" pitchFamily="50" charset="-127"/>
-            </a:endParaRPr>
-          </a:p>
-        </p:txBody>
-      </p:sp>
-      <p:sp>
-        <p:nvSpPr>
-          <p:cNvPr id="21" name="Shape 46">
-            <a:extLst>
-              <a:ext uri="{FF2B5EF4-FFF2-40B4-BE49-F238E27FC236}">
-                <a16:creationId xmlns:a16="http://schemas.microsoft.com/office/drawing/2014/main" id="{718E62E8-6434-4180-9586-2E82CB300520}"/>
-              </a:ext>
-            </a:extLst>
-          </p:cNvPr>
-          <p:cNvSpPr/>
-          <p:nvPr/>
-        </p:nvSpPr>
-        <p:spPr>
-          <a:xfrm>
-            <a:off x="6773584" y="4524201"/>
-            <a:ext cx="111760" cy="112390"/>
-          </a:xfrm>
-          <a:prstGeom prst="line">
-            <a:avLst/>
-          </a:prstGeom>
-          <a:solidFill>
-            <a:srgbClr val="EF9F27"/>
-          </a:solidFill>
-          <a:ln w="12700">
-            <a:solidFill>
-              <a:srgbClr val="EF9F27"/>
-            </a:solidFill>
-            <a:prstDash val="solid"/>
-          </a:ln>
-        </p:spPr>
-      </p:sp>
-      <p:sp>
-        <p:nvSpPr>
-          <p:cNvPr id="22" name="Shape 47">
-            <a:extLst>
-              <a:ext uri="{FF2B5EF4-FFF2-40B4-BE49-F238E27FC236}">
-                <a16:creationId xmlns:a16="http://schemas.microsoft.com/office/drawing/2014/main" id="{8A5F473C-3E2A-4EC2-9726-E4D9F385040A}"/>
-              </a:ext>
-            </a:extLst>
-          </p:cNvPr>
-          <p:cNvSpPr/>
-          <p:nvPr/>
-        </p:nvSpPr>
-        <p:spPr>
-          <a:xfrm>
-            <a:off x="6874168" y="4569157"/>
-            <a:ext cx="279400" cy="22478"/>
-          </a:xfrm>
-          <a:prstGeom prst="rect">
-            <a:avLst/>
-          </a:prstGeom>
-          <a:solidFill>
-            <a:srgbClr val="EF9F27"/>
-          </a:solidFill>
-          <a:ln w="12700">
-            <a:solidFill>
-              <a:srgbClr val="EF9F27"/>
-            </a:solidFill>
-            <a:prstDash val="solid"/>
-          </a:ln>
-        </p:spPr>
-      </p:sp>
-      <p:sp>
-        <p:nvSpPr>
-          <p:cNvPr id="23" name="Text 48">
-            <a:extLst>
-              <a:ext uri="{FF2B5EF4-FFF2-40B4-BE49-F238E27FC236}">
-                <a16:creationId xmlns:a16="http://schemas.microsoft.com/office/drawing/2014/main" id="{C984B889-68A4-4961-AFDC-BA54B48CA10D}"/>
-              </a:ext>
-            </a:extLst>
-          </p:cNvPr>
-          <p:cNvSpPr/>
-          <p:nvPr/>
-        </p:nvSpPr>
-        <p:spPr>
-          <a:xfrm>
-            <a:off x="7153567" y="4439424"/>
-            <a:ext cx="1524765" cy="280975"/>
-          </a:xfrm>
-          <a:prstGeom prst="rect">
-            <a:avLst/>
-          </a:prstGeom>
-          <a:noFill/>
-          <a:ln/>
-        </p:spPr>
-        <p:txBody>
-          <a:bodyPr wrap="square" rtlCol="0" anchor="ctr"/>
-          <a:lstStyle/>
-          <a:p>
-            <a:pPr marL="0" indent="0">
-              <a:buNone/>
-            </a:pPr>
-            <a:r>
-              <a:rPr lang="en-US" sz="1200" b="1">
-                <a:solidFill>
-                  <a:srgbClr val="0D2D6B"/>
-                </a:solidFill>
-                <a:latin typeface="맑은 고딕" panose="020B0503020000020004" pitchFamily="50" charset="-127"/>
-                <a:ea typeface="맑은 고딕" panose="020B0503020000020004" pitchFamily="50" charset="-127"/>
-                <a:cs typeface="Calibri" pitchFamily="34" charset="-120"/>
-              </a:rPr>
-              <a:t>⑤ </a:t>
-            </a:r>
-            <a:r>
-              <a:rPr lang="ko-KR" altLang="en-US" sz="1200" b="1" dirty="0">
-                <a:solidFill>
-                  <a:srgbClr val="0D2D6B"/>
-                </a:solidFill>
-                <a:latin typeface="맑은 고딕" panose="020B0503020000020004" pitchFamily="50" charset="-127"/>
-                <a:ea typeface="맑은 고딕" panose="020B0503020000020004" pitchFamily="50" charset="-127"/>
-                <a:cs typeface="Calibri" pitchFamily="34" charset="-120"/>
-              </a:rPr>
-              <a:t>약물 상호작용</a:t>
-            </a:r>
-            <a:endParaRPr lang="en-US" sz="1200" dirty="0">
-              <a:latin typeface="맑은 고딕" panose="020B0503020000020004" pitchFamily="50" charset="-127"/>
-            </a:endParaRPr>
-          </a:p>
-        </p:txBody>
-      </p:sp>
-      <p:sp>
-        <p:nvSpPr>
-          <p:cNvPr id="24" name="Text 49">
-            <a:extLst>
-              <a:ext uri="{FF2B5EF4-FFF2-40B4-BE49-F238E27FC236}">
-                <a16:creationId xmlns:a16="http://schemas.microsoft.com/office/drawing/2014/main" id="{24ABE5F4-CFDC-4664-B4BA-25AB91554355}"/>
-              </a:ext>
-            </a:extLst>
-          </p:cNvPr>
-          <p:cNvSpPr/>
-          <p:nvPr/>
-        </p:nvSpPr>
-        <p:spPr>
-          <a:xfrm>
-            <a:off x="7153568" y="4697921"/>
-            <a:ext cx="3967480" cy="337170"/>
-          </a:xfrm>
-          <a:prstGeom prst="rect">
-            <a:avLst/>
-          </a:prstGeom>
-          <a:noFill/>
-          <a:ln/>
-        </p:spPr>
-        <p:txBody>
-          <a:bodyPr wrap="square" rtlCol="0" anchor="ctr"/>
-          <a:lstStyle/>
-          <a:p>
-            <a:pPr marL="0" indent="0">
-              <a:buNone/>
-            </a:pPr>
-            <a:r>
-              <a:rPr lang="ko-KR" altLang="en-US" sz="1200" dirty="0">
-                <a:solidFill>
-                  <a:srgbClr val="64748B"/>
-                </a:solidFill>
-                <a:latin typeface="맑은 고딕" panose="020B0503020000020004" pitchFamily="50" charset="-127"/>
-                <a:ea typeface="맑은 고딕" panose="020B0503020000020004" pitchFamily="50" charset="-127"/>
-                <a:cs typeface="Calibri" pitchFamily="34" charset="-120"/>
-              </a:rPr>
-              <a:t>주의가 필요한 상호작용 분석 후</a:t>
+              <a:t>약품명</a:t>
             </a:r>
             <a:r>
               <a:rPr lang="en-US" altLang="ko-KR" sz="1200" dirty="0">
@@ -5295,174 +4855,29 @@
                 <a:ea typeface="맑은 고딕" panose="020B0503020000020004" pitchFamily="50" charset="-127"/>
                 <a:cs typeface="Calibri" pitchFamily="34" charset="-120"/>
               </a:rPr>
-              <a:t>경고</a:t>
-            </a:r>
-            <a:endParaRPr lang="en-US" sz="1200" dirty="0">
-              <a:latin typeface="맑은 고딕" panose="020B0503020000020004" pitchFamily="50" charset="-127"/>
-            </a:endParaRPr>
-          </a:p>
-        </p:txBody>
-      </p:sp>
-      <p:sp>
-        <p:nvSpPr>
-          <p:cNvPr id="29" name="Shape 46">
-            <a:extLst>
-              <a:ext uri="{FF2B5EF4-FFF2-40B4-BE49-F238E27FC236}">
-                <a16:creationId xmlns:a16="http://schemas.microsoft.com/office/drawing/2014/main" id="{82435918-1E5C-4DA8-BA47-F3F523798F0B}"/>
-              </a:ext>
-            </a:extLst>
-          </p:cNvPr>
-          <p:cNvSpPr/>
-          <p:nvPr/>
-        </p:nvSpPr>
-        <p:spPr>
-          <a:xfrm>
-            <a:off x="6762409" y="5321241"/>
-            <a:ext cx="111760" cy="112390"/>
-          </a:xfrm>
-          <a:prstGeom prst="line">
-            <a:avLst/>
-          </a:prstGeom>
-          <a:solidFill>
-            <a:srgbClr val="EF9F27"/>
-          </a:solidFill>
-          <a:ln w="12700">
-            <a:solidFill>
-              <a:srgbClr val="EF9F27"/>
-            </a:solidFill>
-            <a:prstDash val="solid"/>
-          </a:ln>
-        </p:spPr>
-      </p:sp>
-      <p:sp>
-        <p:nvSpPr>
-          <p:cNvPr id="30" name="Shape 47">
-            <a:extLst>
-              <a:ext uri="{FF2B5EF4-FFF2-40B4-BE49-F238E27FC236}">
-                <a16:creationId xmlns:a16="http://schemas.microsoft.com/office/drawing/2014/main" id="{369F9DED-A6A6-4804-AD8D-7A4FA1BE572B}"/>
-              </a:ext>
-            </a:extLst>
-          </p:cNvPr>
-          <p:cNvSpPr/>
-          <p:nvPr/>
-        </p:nvSpPr>
-        <p:spPr>
-          <a:xfrm>
-            <a:off x="6862993" y="5366197"/>
-            <a:ext cx="279400" cy="22478"/>
-          </a:xfrm>
-          <a:prstGeom prst="rect">
-            <a:avLst/>
-          </a:prstGeom>
-          <a:solidFill>
-            <a:srgbClr val="EF9F27"/>
-          </a:solidFill>
-          <a:ln w="12700">
-            <a:solidFill>
-              <a:srgbClr val="EF9F27"/>
-            </a:solidFill>
-            <a:prstDash val="solid"/>
-          </a:ln>
-        </p:spPr>
-      </p:sp>
-      <p:sp>
-        <p:nvSpPr>
-          <p:cNvPr id="31" name="Text 48">
-            <a:extLst>
-              <a:ext uri="{FF2B5EF4-FFF2-40B4-BE49-F238E27FC236}">
-                <a16:creationId xmlns:a16="http://schemas.microsoft.com/office/drawing/2014/main" id="{5ECF8657-6912-4D8E-9759-14E63891101C}"/>
-              </a:ext>
-            </a:extLst>
-          </p:cNvPr>
-          <p:cNvSpPr/>
-          <p:nvPr/>
-        </p:nvSpPr>
-        <p:spPr>
-          <a:xfrm>
-            <a:off x="7142392" y="5236464"/>
-            <a:ext cx="1773008" cy="280975"/>
-          </a:xfrm>
-          <a:prstGeom prst="rect">
-            <a:avLst/>
-          </a:prstGeom>
-          <a:noFill/>
-          <a:ln/>
-        </p:spPr>
-        <p:txBody>
-          <a:bodyPr wrap="square" rtlCol="0" anchor="ctr"/>
-          <a:lstStyle/>
-          <a:p>
-            <a:pPr marL="0" indent="0">
-              <a:buNone/>
-            </a:pPr>
-            <a:r>
-              <a:rPr lang="en-US" sz="1200" b="1" dirty="0">
-                <a:solidFill>
-                  <a:srgbClr val="0D2D6B"/>
+              <a:t>용량</a:t>
+            </a:r>
+            <a:r>
+              <a:rPr lang="en-US" altLang="ko-KR" sz="1200" dirty="0">
+                <a:solidFill>
+                  <a:srgbClr val="64748B"/>
                 </a:solidFill>
                 <a:latin typeface="맑은 고딕" panose="020B0503020000020004" pitchFamily="50" charset="-127"/>
                 <a:ea typeface="맑은 고딕" panose="020B0503020000020004" pitchFamily="50" charset="-127"/>
                 <a:cs typeface="Calibri" pitchFamily="34" charset="-120"/>
               </a:rPr>
-              <a:t>⑥ </a:t>
-            </a:r>
-            <a:r>
-              <a:rPr lang="ko-KR" altLang="en-US" sz="1200" b="1" dirty="0">
-                <a:solidFill>
-                  <a:srgbClr val="0D2D6B"/>
+              <a:t>/</a:t>
+            </a:r>
+            <a:r>
+              <a:rPr lang="ko-KR" altLang="en-US" sz="1200" dirty="0">
+                <a:solidFill>
+                  <a:srgbClr val="64748B"/>
                 </a:solidFill>
                 <a:latin typeface="맑은 고딕" panose="020B0503020000020004" pitchFamily="50" charset="-127"/>
                 <a:ea typeface="맑은 고딕" panose="020B0503020000020004" pitchFamily="50" charset="-127"/>
                 <a:cs typeface="Calibri" pitchFamily="34" charset="-120"/>
               </a:rPr>
-              <a:t>다제약물 주의사항</a:t>
-            </a:r>
-            <a:endParaRPr lang="en-US" sz="1200" dirty="0">
-              <a:latin typeface="맑은 고딕" panose="020B0503020000020004" pitchFamily="50" charset="-127"/>
-            </a:endParaRPr>
-          </a:p>
-        </p:txBody>
-      </p:sp>
-      <p:sp>
-        <p:nvSpPr>
-          <p:cNvPr id="32" name="Text 49">
-            <a:extLst>
-              <a:ext uri="{FF2B5EF4-FFF2-40B4-BE49-F238E27FC236}">
-                <a16:creationId xmlns:a16="http://schemas.microsoft.com/office/drawing/2014/main" id="{0B6DEEB5-091F-44FB-8D6C-9B948F734E32}"/>
-              </a:ext>
-            </a:extLst>
-          </p:cNvPr>
-          <p:cNvSpPr/>
-          <p:nvPr/>
-        </p:nvSpPr>
-        <p:spPr>
-          <a:xfrm>
-            <a:off x="7142393" y="5494961"/>
-            <a:ext cx="3967480" cy="337170"/>
-          </a:xfrm>
-          <a:prstGeom prst="rect">
-            <a:avLst/>
-          </a:prstGeom>
-          <a:noFill/>
-          <a:ln/>
-        </p:spPr>
-        <p:txBody>
-          <a:bodyPr wrap="square" rtlCol="0" anchor="ctr"/>
-          <a:lstStyle/>
-          <a:p>
-            <a:pPr marL="0" indent="0">
-              <a:buNone/>
-            </a:pPr>
-            <a:r>
-              <a:rPr lang="ko-KR" altLang="en-US" sz="1200" dirty="0">
-                <a:solidFill>
-                  <a:srgbClr val="64748B"/>
-                </a:solidFill>
-                <a:latin typeface="맑은 고딕" panose="020B0503020000020004" pitchFamily="50" charset="-127"/>
-                <a:ea typeface="맑은 고딕" panose="020B0503020000020004" pitchFamily="50" charset="-127"/>
-                <a:cs typeface="Calibri" pitchFamily="34" charset="-120"/>
-              </a:rPr>
-              <a:t>종합적으로 처방 내역 확인 후</a:t>
+              <a:t>용법</a:t>
             </a:r>
             <a:r>
               <a:rPr lang="en-US" altLang="ko-KR" sz="1200" dirty="0">
@@ -5484,7 +4899,51 @@
                 <a:ea typeface="맑은 고딕" panose="020B0503020000020004" pitchFamily="50" charset="-127"/>
                 <a:cs typeface="Calibri" pitchFamily="34" charset="-120"/>
               </a:rPr>
-              <a:t>주의사항 표시</a:t>
+              <a:t>처방기간</a:t>
+            </a:r>
+            <a:r>
+              <a:rPr lang="en-US" altLang="ko-KR" sz="1200" dirty="0">
+                <a:solidFill>
+                  <a:srgbClr val="64748B"/>
+                </a:solidFill>
+                <a:latin typeface="맑은 고딕" panose="020B0503020000020004" pitchFamily="50" charset="-127"/>
+                <a:ea typeface="맑은 고딕" panose="020B0503020000020004" pitchFamily="50" charset="-127"/>
+                <a:cs typeface="Calibri" pitchFamily="34" charset="-120"/>
+              </a:rPr>
+              <a:t>, </a:t>
+            </a:r>
+            <a:r>
+              <a:rPr lang="ko-KR" altLang="en-US" sz="1200" dirty="0">
+                <a:solidFill>
+                  <a:srgbClr val="64748B"/>
+                </a:solidFill>
+                <a:latin typeface="맑은 고딕" panose="020B0503020000020004" pitchFamily="50" charset="-127"/>
+                <a:ea typeface="맑은 고딕" panose="020B0503020000020004" pitchFamily="50" charset="-127"/>
+                <a:cs typeface="Calibri" pitchFamily="34" charset="-120"/>
+              </a:rPr>
+              <a:t>계통</a:t>
+            </a:r>
+            <a:r>
+              <a:rPr lang="en-US" altLang="ko-KR" sz="1200" dirty="0">
+                <a:solidFill>
+                  <a:srgbClr val="64748B"/>
+                </a:solidFill>
+                <a:latin typeface="맑은 고딕" panose="020B0503020000020004" pitchFamily="50" charset="-127"/>
+                <a:ea typeface="맑은 고딕" panose="020B0503020000020004" pitchFamily="50" charset="-127"/>
+                <a:cs typeface="Calibri" pitchFamily="34" charset="-120"/>
+              </a:rPr>
+              <a:t>, </a:t>
+            </a:r>
+            <a:r>
+              <a:rPr lang="ko-KR" altLang="en-US" sz="1200" dirty="0">
+                <a:solidFill>
+                  <a:srgbClr val="64748B"/>
+                </a:solidFill>
+                <a:latin typeface="맑은 고딕" panose="020B0503020000020004" pitchFamily="50" charset="-127"/>
+                <a:ea typeface="맑은 고딕" panose="020B0503020000020004" pitchFamily="50" charset="-127"/>
+                <a:cs typeface="Calibri" pitchFamily="34" charset="-120"/>
+              </a:rPr>
+              <a:t>상태 표시</a:t>
             </a:r>
             <a:endParaRPr lang="en-US" sz="1200" dirty="0">
               <a:latin typeface="맑은 고딕" panose="020B0503020000020004" pitchFamily="50" charset="-127"/>
@@ -5544,6 +5003,205 @@
               </a:rPr>
               <a:t>처장님 내용 검토 필요</a:t>
             </a:r>
+          </a:p>
+        </p:txBody>
+      </p:sp>
+      <p:sp>
+        <p:nvSpPr>
+          <p:cNvPr id="34" name="Shape 42">
+            <a:extLst>
+              <a:ext uri="{FF2B5EF4-FFF2-40B4-BE49-F238E27FC236}">
+                <a16:creationId xmlns:a16="http://schemas.microsoft.com/office/drawing/2014/main" id="{27EA0142-7BBC-4421-85F0-F9495D37A22B}"/>
+              </a:ext>
+            </a:extLst>
+          </p:cNvPr>
+          <p:cNvSpPr/>
+          <p:nvPr/>
+        </p:nvSpPr>
+        <p:spPr>
+          <a:xfrm>
+            <a:off x="6736581" y="4272291"/>
+            <a:ext cx="111760" cy="112390"/>
+          </a:xfrm>
+          <a:prstGeom prst="line">
+            <a:avLst/>
+          </a:prstGeom>
+          <a:solidFill>
+            <a:srgbClr val="EF9F27"/>
+          </a:solidFill>
+          <a:ln w="12700">
+            <a:solidFill>
+              <a:srgbClr val="EF9F27"/>
+            </a:solidFill>
+            <a:prstDash val="solid"/>
+          </a:ln>
+        </p:spPr>
+      </p:sp>
+      <p:sp>
+        <p:nvSpPr>
+          <p:cNvPr id="35" name="Shape 43">
+            <a:extLst>
+              <a:ext uri="{FF2B5EF4-FFF2-40B4-BE49-F238E27FC236}">
+                <a16:creationId xmlns:a16="http://schemas.microsoft.com/office/drawing/2014/main" id="{0E7178A7-D00E-4C21-9389-DA5A5155B9E7}"/>
+              </a:ext>
+            </a:extLst>
+          </p:cNvPr>
+          <p:cNvSpPr/>
+          <p:nvPr/>
+        </p:nvSpPr>
+        <p:spPr>
+          <a:xfrm>
+            <a:off x="6837165" y="4317244"/>
+            <a:ext cx="279400" cy="22478"/>
+          </a:xfrm>
+          <a:prstGeom prst="rect">
+            <a:avLst/>
+          </a:prstGeom>
+          <a:solidFill>
+            <a:srgbClr val="EF9F27"/>
+          </a:solidFill>
+          <a:ln w="12700">
+            <a:solidFill>
+              <a:srgbClr val="EF9F27"/>
+            </a:solidFill>
+            <a:prstDash val="solid"/>
+          </a:ln>
+        </p:spPr>
+      </p:sp>
+      <p:sp>
+        <p:nvSpPr>
+          <p:cNvPr id="36" name="Text 44">
+            <a:extLst>
+              <a:ext uri="{FF2B5EF4-FFF2-40B4-BE49-F238E27FC236}">
+                <a16:creationId xmlns:a16="http://schemas.microsoft.com/office/drawing/2014/main" id="{FAFAC258-152C-49EA-9320-340C714CAEED}"/>
+              </a:ext>
+            </a:extLst>
+          </p:cNvPr>
+          <p:cNvSpPr/>
+          <p:nvPr/>
+        </p:nvSpPr>
+        <p:spPr>
+          <a:xfrm>
+            <a:off x="7164741" y="4099548"/>
+            <a:ext cx="1575566" cy="280975"/>
+          </a:xfrm>
+          <a:prstGeom prst="rect">
+            <a:avLst/>
+          </a:prstGeom>
+          <a:noFill/>
+          <a:ln/>
+        </p:spPr>
+        <p:txBody>
+          <a:bodyPr wrap="square" rtlCol="0" anchor="ctr"/>
+          <a:lstStyle/>
+          <a:p>
+            <a:r>
+              <a:rPr lang="en-US" altLang="ko-KR" sz="1200" b="1" dirty="0">
+                <a:solidFill>
+                  <a:srgbClr val="0D2D6B"/>
+                </a:solidFill>
+                <a:latin typeface="맑은 고딕" panose="020B0503020000020004" pitchFamily="50" charset="-127"/>
+                <a:cs typeface="Calibri" pitchFamily="34" charset="-120"/>
+              </a:rPr>
+              <a:t>④</a:t>
+            </a:r>
+            <a:r>
+              <a:rPr lang="en-US" sz="1200" b="1" dirty="0">
+                <a:solidFill>
+                  <a:srgbClr val="0D2D6B"/>
+                </a:solidFill>
+                <a:latin typeface="맑은 고딕" panose="020B0503020000020004" pitchFamily="50" charset="-127"/>
+                <a:ea typeface="맑은 고딕" panose="020B0503020000020004" pitchFamily="50" charset="-127"/>
+                <a:cs typeface="Calibri" pitchFamily="34" charset="-120"/>
+              </a:rPr>
+              <a:t> </a:t>
+            </a:r>
+            <a:r>
+              <a:rPr lang="ko-KR" altLang="en-US" sz="1200" b="1" dirty="0">
+                <a:solidFill>
+                  <a:srgbClr val="0D2D6B"/>
+                </a:solidFill>
+                <a:latin typeface="맑은 고딕" panose="020B0503020000020004" pitchFamily="50" charset="-127"/>
+                <a:ea typeface="맑은 고딕" panose="020B0503020000020004" pitchFamily="50" charset="-127"/>
+                <a:cs typeface="Calibri" pitchFamily="34" charset="-120"/>
+              </a:rPr>
+              <a:t>주의사항</a:t>
+            </a:r>
+            <a:endParaRPr lang="en-US" sz="1200" dirty="0">
+              <a:latin typeface="맑은 고딕" panose="020B0503020000020004" pitchFamily="50" charset="-127"/>
+            </a:endParaRPr>
+          </a:p>
+        </p:txBody>
+      </p:sp>
+      <p:sp>
+        <p:nvSpPr>
+          <p:cNvPr id="37" name="Text 45">
+            <a:extLst>
+              <a:ext uri="{FF2B5EF4-FFF2-40B4-BE49-F238E27FC236}">
+                <a16:creationId xmlns:a16="http://schemas.microsoft.com/office/drawing/2014/main" id="{1C5B4896-03A7-48F4-A888-8E1618DCB570}"/>
+              </a:ext>
+            </a:extLst>
+          </p:cNvPr>
+          <p:cNvSpPr/>
+          <p:nvPr/>
+        </p:nvSpPr>
+        <p:spPr>
+          <a:xfrm>
+            <a:off x="7164741" y="4384681"/>
+            <a:ext cx="3833885" cy="337171"/>
+          </a:xfrm>
+          <a:prstGeom prst="rect">
+            <a:avLst/>
+          </a:prstGeom>
+          <a:noFill/>
+          <a:ln/>
+        </p:spPr>
+        <p:txBody>
+          <a:bodyPr wrap="square" rtlCol="0" anchor="ctr"/>
+          <a:lstStyle/>
+          <a:p>
+            <a:pPr marL="0" indent="0">
+              <a:lnSpc>
+                <a:spcPct val="150000"/>
+              </a:lnSpc>
+              <a:buNone/>
+            </a:pPr>
+            <a:r>
+              <a:rPr lang="ko-KR" altLang="en-US" sz="1200" dirty="0">
+                <a:solidFill>
+                  <a:srgbClr val="64748B"/>
+                </a:solidFill>
+                <a:latin typeface="맑은 고딕" panose="020B0503020000020004" pitchFamily="50" charset="-127"/>
+                <a:ea typeface="맑은 고딕" panose="020B0503020000020004" pitchFamily="50" charset="-127"/>
+                <a:cs typeface="Calibri" pitchFamily="34" charset="-120"/>
+              </a:rPr>
+              <a:t>약물 간 상호작용</a:t>
+            </a:r>
+            <a:r>
+              <a:rPr lang="en-US" altLang="ko-KR" sz="1200" dirty="0">
+                <a:solidFill>
+                  <a:srgbClr val="64748B"/>
+                </a:solidFill>
+                <a:latin typeface="맑은 고딕" panose="020B0503020000020004" pitchFamily="50" charset="-127"/>
+                <a:ea typeface="맑은 고딕" panose="020B0503020000020004" pitchFamily="50" charset="-127"/>
+                <a:cs typeface="Calibri" pitchFamily="34" charset="-120"/>
+              </a:rPr>
+              <a:t>, </a:t>
+            </a:r>
+            <a:r>
+              <a:rPr lang="ko-KR" altLang="en-US" sz="1200" dirty="0">
+                <a:solidFill>
+                  <a:srgbClr val="64748B"/>
+                </a:solidFill>
+                <a:latin typeface="맑은 고딕" panose="020B0503020000020004" pitchFamily="50" charset="-127"/>
+                <a:ea typeface="맑은 고딕" panose="020B0503020000020004" pitchFamily="50" charset="-127"/>
+                <a:cs typeface="Calibri" pitchFamily="34" charset="-120"/>
+              </a:rPr>
+              <a:t>다제약물 관련 주의할 점 표시</a:t>
+            </a:r>
+            <a:endParaRPr lang="en-US" sz="1200" dirty="0">
+              <a:latin typeface="맑은 고딕" panose="020B0503020000020004" pitchFamily="50" charset="-127"/>
+            </a:endParaRPr>
           </a:p>
         </p:txBody>
       </p:sp>
@@ -5595,33 +5253,36 @@
         </p:nvSpPr>
         <p:spPr/>
         <p:txBody>
-          <a:bodyPr/>
+          <a:bodyPr>
+            <a:normAutofit/>
+          </a:bodyPr>
           <a:lstStyle/>
           <a:p>
             <a:r>
               <a:rPr lang="en-US" altLang="ko-KR" dirty="0"/>
-              <a:t>UI</a:t>
+              <a:t>UI </a:t>
+            </a:r>
+            <a:r>
+              <a:rPr lang="ko-KR" altLang="en-US" dirty="0" err="1"/>
+              <a:t>목업</a:t>
             </a:r>
             <a:r>
               <a:rPr lang="ko-KR" altLang="en-US" dirty="0"/>
               <a:t> </a:t>
             </a:r>
             <a:r>
-              <a:rPr lang="ko-KR" altLang="en-US" dirty="0" err="1"/>
-              <a:t>목업</a:t>
-            </a:r>
-            <a:r>
-              <a:rPr lang="ko-KR" altLang="en-US" dirty="0"/>
-              <a:t> </a:t>
-            </a:r>
-            <a:r>
               <a:rPr lang="en-US" altLang="ko-KR" dirty="0"/>
               <a:t>– </a:t>
             </a:r>
             <a:r>
               <a:rPr lang="ko-KR" altLang="en-US" dirty="0"/>
-              <a:t>경고 창 예시</a:t>
-            </a:r>
+              <a:t>팝업 창 인터페이스 </a:t>
+            </a:r>
+            <a:r>
+              <a:rPr lang="en-US" altLang="ko-KR" dirty="0"/>
+              <a:t>(2)</a:t>
+            </a:r>
+            <a:endParaRPr lang="ko-KR" altLang="en-US" dirty="0"/>
           </a:p>
         </p:txBody>
       </p:sp>
@@ -5630,7 +5291,7 @@
           <p:cNvPr id="4" name="그림 3">
             <a:extLst>
               <a:ext uri="{FF2B5EF4-FFF2-40B4-BE49-F238E27FC236}">
-                <a16:creationId xmlns:a16="http://schemas.microsoft.com/office/drawing/2014/main" id="{045E0500-361C-4E45-AFD3-D8BBCE44A132}"/>
+                <a16:creationId xmlns:a16="http://schemas.microsoft.com/office/drawing/2014/main" id="{4B844D71-B509-415B-BF4E-BF09323E8408}"/>
               </a:ext>
             </a:extLst>
           </p:cNvPr>
@@ -5639,7 +5300,7 @@
           </p:cNvPicPr>
           <p:nvPr/>
         </p:nvPicPr>
-        <p:blipFill rotWithShape="1">
+        <p:blipFill>
           <a:blip r:embed="rId2">
             <a:extLst>
               <a:ext uri="{28A0092B-C50C-407E-A947-70E740481C1C}">
@@ -5647,61 +5308,18 @@
               </a:ext>
             </a:extLst>
           </a:blip>
-          <a:srcRect l="351" r="609" b="892"/>
-          <a:stretch/>
+          <a:stretch>
+            <a:fillRect/>
+          </a:stretch>
         </p:blipFill>
         <p:spPr>
           <a:xfrm>
-            <a:off x="427567" y="1218171"/>
-            <a:ext cx="5263776" cy="4132764"/>
+            <a:off x="1345016" y="1531766"/>
+            <a:ext cx="5750049" cy="3575771"/>
           </a:xfrm>
           <a:prstGeom prst="roundRect">
             <a:avLst>
-              <a:gd name="adj" fmla="val 2326"/>
-            </a:avLst>
-          </a:prstGeom>
-          <a:ln>
-            <a:solidFill>
-              <a:schemeClr val="bg2">
-                <a:lumMod val="90000"/>
-              </a:schemeClr>
-            </a:solidFill>
-          </a:ln>
-        </p:spPr>
-      </p:pic>
-      <p:pic>
-        <p:nvPicPr>
-          <p:cNvPr id="6" name="그림 5">
-            <a:extLst>
-              <a:ext uri="{FF2B5EF4-FFF2-40B4-BE49-F238E27FC236}">
-                <a16:creationId xmlns:a16="http://schemas.microsoft.com/office/drawing/2014/main" id="{60893497-F05A-4263-A304-40B0F4FC927F}"/>
-              </a:ext>
-            </a:extLst>
-          </p:cNvPr>
-          <p:cNvPicPr>
-            <a:picLocks noChangeAspect="1"/>
-          </p:cNvPicPr>
-          <p:nvPr/>
-        </p:nvPicPr>
-        <p:blipFill rotWithShape="1">
-          <a:blip r:embed="rId3">
-            <a:extLst>
-              <a:ext uri="{28A0092B-C50C-407E-A947-70E740481C1C}">
-                <a14:useLocalDpi xmlns:a14="http://schemas.microsoft.com/office/drawing/2010/main" val="0"/>
-              </a:ext>
-            </a:extLst>
-          </a:blip>
-          <a:srcRect l="434"/>
-          <a:stretch/>
-        </p:blipFill>
-        <p:spPr>
-          <a:xfrm>
-            <a:off x="5831458" y="1218171"/>
-            <a:ext cx="5979655" cy="3641696"/>
-          </a:xfrm>
-          <a:prstGeom prst="roundRect">
-            <a:avLst>
-              <a:gd name="adj" fmla="val 2717"/>
+              <a:gd name="adj" fmla="val 2038"/>
             </a:avLst>
           </a:prstGeom>
           <a:ln>
@@ -5715,10 +5333,388 @@
       </p:pic>
       <p:sp>
         <p:nvSpPr>
-          <p:cNvPr id="7" name="TextBox 6">
+          <p:cNvPr id="21" name="Shape 46">
             <a:extLst>
               <a:ext uri="{FF2B5EF4-FFF2-40B4-BE49-F238E27FC236}">
-                <a16:creationId xmlns:a16="http://schemas.microsoft.com/office/drawing/2014/main" id="{8D1112C8-2A6F-48A9-90E1-37393E773D7D}"/>
+                <a16:creationId xmlns:a16="http://schemas.microsoft.com/office/drawing/2014/main" id="{718E62E8-6434-4180-9586-2E82CB300520}"/>
+              </a:ext>
+            </a:extLst>
+          </p:cNvPr>
+          <p:cNvSpPr/>
+          <p:nvPr/>
+        </p:nvSpPr>
+        <p:spPr>
+          <a:xfrm>
+            <a:off x="6756059" y="1800764"/>
+            <a:ext cx="111760" cy="112390"/>
+          </a:xfrm>
+          <a:prstGeom prst="line">
+            <a:avLst/>
+          </a:prstGeom>
+          <a:solidFill>
+            <a:srgbClr val="EF9F27"/>
+          </a:solidFill>
+          <a:ln w="12700">
+            <a:solidFill>
+              <a:srgbClr val="EF9F27"/>
+            </a:solidFill>
+            <a:prstDash val="solid"/>
+          </a:ln>
+        </p:spPr>
+      </p:sp>
+      <p:sp>
+        <p:nvSpPr>
+          <p:cNvPr id="22" name="Shape 47">
+            <a:extLst>
+              <a:ext uri="{FF2B5EF4-FFF2-40B4-BE49-F238E27FC236}">
+                <a16:creationId xmlns:a16="http://schemas.microsoft.com/office/drawing/2014/main" id="{8A5F473C-3E2A-4EC2-9726-E4D9F385040A}"/>
+              </a:ext>
+            </a:extLst>
+          </p:cNvPr>
+          <p:cNvSpPr/>
+          <p:nvPr/>
+        </p:nvSpPr>
+        <p:spPr>
+          <a:xfrm>
+            <a:off x="6856643" y="1845720"/>
+            <a:ext cx="279400" cy="22478"/>
+          </a:xfrm>
+          <a:prstGeom prst="rect">
+            <a:avLst/>
+          </a:prstGeom>
+          <a:solidFill>
+            <a:srgbClr val="EF9F27"/>
+          </a:solidFill>
+          <a:ln w="12700">
+            <a:solidFill>
+              <a:srgbClr val="EF9F27"/>
+            </a:solidFill>
+            <a:prstDash val="solid"/>
+          </a:ln>
+        </p:spPr>
+      </p:sp>
+      <p:sp>
+        <p:nvSpPr>
+          <p:cNvPr id="23" name="Text 48">
+            <a:extLst>
+              <a:ext uri="{FF2B5EF4-FFF2-40B4-BE49-F238E27FC236}">
+                <a16:creationId xmlns:a16="http://schemas.microsoft.com/office/drawing/2014/main" id="{C984B889-68A4-4961-AFDC-BA54B48CA10D}"/>
+              </a:ext>
+            </a:extLst>
+          </p:cNvPr>
+          <p:cNvSpPr/>
+          <p:nvPr/>
+        </p:nvSpPr>
+        <p:spPr>
+          <a:xfrm>
+            <a:off x="7136042" y="1715987"/>
+            <a:ext cx="1524765" cy="280975"/>
+          </a:xfrm>
+          <a:prstGeom prst="rect">
+            <a:avLst/>
+          </a:prstGeom>
+          <a:noFill/>
+          <a:ln/>
+        </p:spPr>
+        <p:txBody>
+          <a:bodyPr wrap="square" rtlCol="0" anchor="ctr"/>
+          <a:lstStyle/>
+          <a:p>
+            <a:pPr marL="0" indent="0">
+              <a:buNone/>
+            </a:pPr>
+            <a:r>
+              <a:rPr lang="en-US" sz="1200" b="1" dirty="0">
+                <a:solidFill>
+                  <a:srgbClr val="0D2D6B"/>
+                </a:solidFill>
+                <a:latin typeface="맑은 고딕" panose="020B0503020000020004" pitchFamily="50" charset="-127"/>
+                <a:ea typeface="맑은 고딕" panose="020B0503020000020004" pitchFamily="50" charset="-127"/>
+                <a:cs typeface="Calibri" pitchFamily="34" charset="-120"/>
+              </a:rPr>
+              <a:t>⑤ </a:t>
+            </a:r>
+            <a:r>
+              <a:rPr lang="ko-KR" altLang="en-US" sz="1200" b="1" dirty="0">
+                <a:solidFill>
+                  <a:srgbClr val="0D2D6B"/>
+                </a:solidFill>
+                <a:latin typeface="맑은 고딕" panose="020B0503020000020004" pitchFamily="50" charset="-127"/>
+                <a:ea typeface="맑은 고딕" panose="020B0503020000020004" pitchFamily="50" charset="-127"/>
+                <a:cs typeface="Calibri" pitchFamily="34" charset="-120"/>
+              </a:rPr>
+              <a:t>약물 상호작용</a:t>
+            </a:r>
+            <a:endParaRPr lang="en-US" sz="1200" dirty="0">
+              <a:latin typeface="맑은 고딕" panose="020B0503020000020004" pitchFamily="50" charset="-127"/>
+            </a:endParaRPr>
+          </a:p>
+        </p:txBody>
+      </p:sp>
+      <p:sp>
+        <p:nvSpPr>
+          <p:cNvPr id="24" name="Text 49">
+            <a:extLst>
+              <a:ext uri="{FF2B5EF4-FFF2-40B4-BE49-F238E27FC236}">
+                <a16:creationId xmlns:a16="http://schemas.microsoft.com/office/drawing/2014/main" id="{24ABE5F4-CFDC-4664-B4BA-25AB91554355}"/>
+              </a:ext>
+            </a:extLst>
+          </p:cNvPr>
+          <p:cNvSpPr/>
+          <p:nvPr/>
+        </p:nvSpPr>
+        <p:spPr>
+          <a:xfrm>
+            <a:off x="7136043" y="1974484"/>
+            <a:ext cx="3967480" cy="337170"/>
+          </a:xfrm>
+          <a:prstGeom prst="rect">
+            <a:avLst/>
+          </a:prstGeom>
+          <a:noFill/>
+          <a:ln/>
+        </p:spPr>
+        <p:txBody>
+          <a:bodyPr wrap="square" rtlCol="0" anchor="ctr"/>
+          <a:lstStyle/>
+          <a:p>
+            <a:pPr marL="0" indent="0">
+              <a:buNone/>
+            </a:pPr>
+            <a:r>
+              <a:rPr lang="ko-KR" altLang="en-US" sz="1200" dirty="0">
+                <a:solidFill>
+                  <a:srgbClr val="64748B"/>
+                </a:solidFill>
+                <a:latin typeface="맑은 고딕" panose="020B0503020000020004" pitchFamily="50" charset="-127"/>
+                <a:ea typeface="맑은 고딕" panose="020B0503020000020004" pitchFamily="50" charset="-127"/>
+                <a:cs typeface="Calibri" pitchFamily="34" charset="-120"/>
+              </a:rPr>
+              <a:t>주의가 필요한 상호작용 분석 후</a:t>
+            </a:r>
+            <a:r>
+              <a:rPr lang="en-US" altLang="ko-KR" sz="1200" dirty="0">
+                <a:solidFill>
+                  <a:srgbClr val="64748B"/>
+                </a:solidFill>
+                <a:latin typeface="맑은 고딕" panose="020B0503020000020004" pitchFamily="50" charset="-127"/>
+                <a:ea typeface="맑은 고딕" panose="020B0503020000020004" pitchFamily="50" charset="-127"/>
+                <a:cs typeface="Calibri" pitchFamily="34" charset="-120"/>
+              </a:rPr>
+              <a:t>, </a:t>
+            </a:r>
+            <a:r>
+              <a:rPr lang="ko-KR" altLang="en-US" sz="1200" dirty="0">
+                <a:solidFill>
+                  <a:srgbClr val="64748B"/>
+                </a:solidFill>
+                <a:latin typeface="맑은 고딕" panose="020B0503020000020004" pitchFamily="50" charset="-127"/>
+                <a:ea typeface="맑은 고딕" panose="020B0503020000020004" pitchFamily="50" charset="-127"/>
+                <a:cs typeface="Calibri" pitchFamily="34" charset="-120"/>
+              </a:rPr>
+              <a:t>경고</a:t>
+            </a:r>
+            <a:endParaRPr lang="en-US" sz="1200" dirty="0">
+              <a:latin typeface="맑은 고딕" panose="020B0503020000020004" pitchFamily="50" charset="-127"/>
+            </a:endParaRPr>
+          </a:p>
+        </p:txBody>
+      </p:sp>
+      <p:sp>
+        <p:nvSpPr>
+          <p:cNvPr id="29" name="Shape 46">
+            <a:extLst>
+              <a:ext uri="{FF2B5EF4-FFF2-40B4-BE49-F238E27FC236}">
+                <a16:creationId xmlns:a16="http://schemas.microsoft.com/office/drawing/2014/main" id="{82435918-1E5C-4DA8-BA47-F3F523798F0B}"/>
+              </a:ext>
+            </a:extLst>
+          </p:cNvPr>
+          <p:cNvSpPr/>
+          <p:nvPr/>
+        </p:nvSpPr>
+        <p:spPr>
+          <a:xfrm>
+            <a:off x="6744884" y="3114244"/>
+            <a:ext cx="111760" cy="112390"/>
+          </a:xfrm>
+          <a:prstGeom prst="line">
+            <a:avLst/>
+          </a:prstGeom>
+          <a:solidFill>
+            <a:srgbClr val="EF9F27"/>
+          </a:solidFill>
+          <a:ln w="12700">
+            <a:solidFill>
+              <a:srgbClr val="EF9F27"/>
+            </a:solidFill>
+            <a:prstDash val="solid"/>
+          </a:ln>
+        </p:spPr>
+      </p:sp>
+      <p:sp>
+        <p:nvSpPr>
+          <p:cNvPr id="30" name="Shape 47">
+            <a:extLst>
+              <a:ext uri="{FF2B5EF4-FFF2-40B4-BE49-F238E27FC236}">
+                <a16:creationId xmlns:a16="http://schemas.microsoft.com/office/drawing/2014/main" id="{369F9DED-A6A6-4804-AD8D-7A4FA1BE572B}"/>
+              </a:ext>
+            </a:extLst>
+          </p:cNvPr>
+          <p:cNvSpPr/>
+          <p:nvPr/>
+        </p:nvSpPr>
+        <p:spPr>
+          <a:xfrm>
+            <a:off x="6856643" y="3159006"/>
+            <a:ext cx="279400" cy="22478"/>
+          </a:xfrm>
+          <a:prstGeom prst="rect">
+            <a:avLst/>
+          </a:prstGeom>
+          <a:solidFill>
+            <a:srgbClr val="EF9F27"/>
+          </a:solidFill>
+          <a:ln w="12700">
+            <a:solidFill>
+              <a:srgbClr val="EF9F27"/>
+            </a:solidFill>
+            <a:prstDash val="solid"/>
+          </a:ln>
+        </p:spPr>
+      </p:sp>
+      <p:sp>
+        <p:nvSpPr>
+          <p:cNvPr id="31" name="Text 48">
+            <a:extLst>
+              <a:ext uri="{FF2B5EF4-FFF2-40B4-BE49-F238E27FC236}">
+                <a16:creationId xmlns:a16="http://schemas.microsoft.com/office/drawing/2014/main" id="{5ECF8657-6912-4D8E-9759-14E63891101C}"/>
+              </a:ext>
+            </a:extLst>
+          </p:cNvPr>
+          <p:cNvSpPr/>
+          <p:nvPr/>
+        </p:nvSpPr>
+        <p:spPr>
+          <a:xfrm>
+            <a:off x="7136042" y="3006989"/>
+            <a:ext cx="1773008" cy="280975"/>
+          </a:xfrm>
+          <a:prstGeom prst="rect">
+            <a:avLst/>
+          </a:prstGeom>
+          <a:noFill/>
+          <a:ln/>
+        </p:spPr>
+        <p:txBody>
+          <a:bodyPr wrap="square" rtlCol="0" anchor="ctr"/>
+          <a:lstStyle/>
+          <a:p>
+            <a:pPr marL="0" indent="0">
+              <a:buNone/>
+            </a:pPr>
+            <a:r>
+              <a:rPr lang="en-US" sz="1200" b="1" dirty="0">
+                <a:solidFill>
+                  <a:srgbClr val="0D2D6B"/>
+                </a:solidFill>
+                <a:latin typeface="맑은 고딕" panose="020B0503020000020004" pitchFamily="50" charset="-127"/>
+                <a:ea typeface="맑은 고딕" panose="020B0503020000020004" pitchFamily="50" charset="-127"/>
+                <a:cs typeface="Calibri" pitchFamily="34" charset="-120"/>
+              </a:rPr>
+              <a:t>⑥ </a:t>
+            </a:r>
+            <a:r>
+              <a:rPr lang="ko-KR" altLang="en-US" sz="1200" b="1" dirty="0">
+                <a:solidFill>
+                  <a:srgbClr val="0D2D6B"/>
+                </a:solidFill>
+                <a:latin typeface="맑은 고딕" panose="020B0503020000020004" pitchFamily="50" charset="-127"/>
+                <a:ea typeface="맑은 고딕" panose="020B0503020000020004" pitchFamily="50" charset="-127"/>
+                <a:cs typeface="Calibri" pitchFamily="34" charset="-120"/>
+              </a:rPr>
+              <a:t>다제약물 주의사항</a:t>
+            </a:r>
+            <a:endParaRPr lang="en-US" sz="1200" dirty="0">
+              <a:latin typeface="맑은 고딕" panose="020B0503020000020004" pitchFamily="50" charset="-127"/>
+            </a:endParaRPr>
+          </a:p>
+        </p:txBody>
+      </p:sp>
+      <p:sp>
+        <p:nvSpPr>
+          <p:cNvPr id="32" name="Text 49">
+            <a:extLst>
+              <a:ext uri="{FF2B5EF4-FFF2-40B4-BE49-F238E27FC236}">
+                <a16:creationId xmlns:a16="http://schemas.microsoft.com/office/drawing/2014/main" id="{0B6DEEB5-091F-44FB-8D6C-9B948F734E32}"/>
+              </a:ext>
+            </a:extLst>
+          </p:cNvPr>
+          <p:cNvSpPr/>
+          <p:nvPr/>
+        </p:nvSpPr>
+        <p:spPr>
+          <a:xfrm>
+            <a:off x="7136043" y="3265292"/>
+            <a:ext cx="3967480" cy="337170"/>
+          </a:xfrm>
+          <a:prstGeom prst="rect">
+            <a:avLst/>
+          </a:prstGeom>
+          <a:noFill/>
+          <a:ln/>
+        </p:spPr>
+        <p:txBody>
+          <a:bodyPr wrap="square" rtlCol="0" anchor="ctr"/>
+          <a:lstStyle/>
+          <a:p>
+            <a:pPr marL="0" indent="0">
+              <a:buNone/>
+            </a:pPr>
+            <a:r>
+              <a:rPr lang="ko-KR" altLang="en-US" sz="1200" dirty="0">
+                <a:solidFill>
+                  <a:srgbClr val="64748B"/>
+                </a:solidFill>
+                <a:latin typeface="맑은 고딕" panose="020B0503020000020004" pitchFamily="50" charset="-127"/>
+                <a:ea typeface="맑은 고딕" panose="020B0503020000020004" pitchFamily="50" charset="-127"/>
+                <a:cs typeface="Calibri" pitchFamily="34" charset="-120"/>
+              </a:rPr>
+              <a:t>종합적으로 처방 내역 확인 후</a:t>
+            </a:r>
+            <a:r>
+              <a:rPr lang="en-US" altLang="ko-KR" sz="1200" dirty="0">
+                <a:solidFill>
+                  <a:srgbClr val="64748B"/>
+                </a:solidFill>
+                <a:latin typeface="맑은 고딕" panose="020B0503020000020004" pitchFamily="50" charset="-127"/>
+                <a:ea typeface="맑은 고딕" panose="020B0503020000020004" pitchFamily="50" charset="-127"/>
+                <a:cs typeface="Calibri" pitchFamily="34" charset="-120"/>
+              </a:rPr>
+              <a:t>, </a:t>
+            </a:r>
+            <a:r>
+              <a:rPr lang="ko-KR" altLang="en-US" sz="1200" dirty="0">
+                <a:solidFill>
+                  <a:srgbClr val="64748B"/>
+                </a:solidFill>
+                <a:latin typeface="맑은 고딕" panose="020B0503020000020004" pitchFamily="50" charset="-127"/>
+                <a:ea typeface="맑은 고딕" panose="020B0503020000020004" pitchFamily="50" charset="-127"/>
+                <a:cs typeface="Calibri" pitchFamily="34" charset="-120"/>
+              </a:rPr>
+              <a:t>주의사항 표시</a:t>
+            </a:r>
+            <a:endParaRPr lang="en-US" sz="1200" dirty="0">
+              <a:latin typeface="맑은 고딕" panose="020B0503020000020004" pitchFamily="50" charset="-127"/>
+            </a:endParaRPr>
+          </a:p>
+        </p:txBody>
+      </p:sp>
+      <p:sp>
+        <p:nvSpPr>
+          <p:cNvPr id="33" name="TextBox 32">
+            <a:extLst>
+              <a:ext uri="{FF2B5EF4-FFF2-40B4-BE49-F238E27FC236}">
+                <a16:creationId xmlns:a16="http://schemas.microsoft.com/office/drawing/2014/main" id="{F458B456-4A02-411D-B9EC-AD3C9A91E2D5}"/>
               </a:ext>
             </a:extLst>
           </p:cNvPr>
@@ -5771,7 +5767,7 @@
     </p:spTree>
     <p:extLst>
       <p:ext uri="{BB962C8B-B14F-4D97-AF65-F5344CB8AC3E}">
-        <p14:creationId xmlns:p14="http://schemas.microsoft.com/office/powerpoint/2010/main" val="2719079437"/>
+        <p14:creationId xmlns:p14="http://schemas.microsoft.com/office/powerpoint/2010/main" val="2269855108"/>
       </p:ext>
     </p:extLst>
   </p:cSld>
@@ -5782,1490 +5778,6 @@
 </file>
 
 <file path=ppt/slides/slide5.xml><?xml version="1.0" encoding="utf-8"?>
-<p:sld xmlns:a="http://schemas.openxmlformats.org/drawingml/2006/main" xmlns:r="http://schemas.openxmlformats.org/officeDocument/2006/relationships" xmlns:p="http://schemas.openxmlformats.org/presentationml/2006/main">
-  <p:cSld>
-    <p:spTree>
-      <p:nvGrpSpPr>
-        <p:cNvPr id="1" name=""/>
-        <p:cNvGrpSpPr/>
-        <p:nvPr/>
-      </p:nvGrpSpPr>
-      <p:grpSpPr>
-        <a:xfrm>
-          <a:off x="0" y="0"/>
-          <a:ext cx="0" cy="0"/>
-          <a:chOff x="0" y="0"/>
-          <a:chExt cx="0" cy="0"/>
-        </a:xfrm>
-      </p:grpSpPr>
-      <p:sp>
-        <p:nvSpPr>
-          <p:cNvPr id="2" name="제목 1">
-            <a:extLst>
-              <a:ext uri="{FF2B5EF4-FFF2-40B4-BE49-F238E27FC236}">
-                <a16:creationId xmlns:a16="http://schemas.microsoft.com/office/drawing/2014/main" id="{DAA3E4DE-348D-469C-BCC6-9AD471D21C8A}"/>
-              </a:ext>
-            </a:extLst>
-          </p:cNvPr>
-          <p:cNvSpPr>
-            <a:spLocks noGrp="1"/>
-          </p:cNvSpPr>
-          <p:nvPr>
-            <p:ph type="title"/>
-          </p:nvPr>
-        </p:nvSpPr>
-        <p:spPr/>
-        <p:txBody>
-          <a:bodyPr>
-            <a:normAutofit/>
-          </a:bodyPr>
-          <a:lstStyle/>
-          <a:p>
-            <a:r>
-              <a:rPr lang="ko-KR" altLang="en-US" dirty="0"/>
-              <a:t>기술 스택 및 시스템 구조</a:t>
-            </a:r>
-          </a:p>
-        </p:txBody>
-      </p:sp>
-      <p:sp>
-        <p:nvSpPr>
-          <p:cNvPr id="149" name="Shape 32">
-            <a:extLst>
-              <a:ext uri="{FF2B5EF4-FFF2-40B4-BE49-F238E27FC236}">
-                <a16:creationId xmlns:a16="http://schemas.microsoft.com/office/drawing/2014/main" id="{1EE42D8F-8DC3-4D1F-BFF3-93438725601E}"/>
-              </a:ext>
-            </a:extLst>
-          </p:cNvPr>
-          <p:cNvSpPr/>
-          <p:nvPr/>
-        </p:nvSpPr>
-        <p:spPr>
-          <a:xfrm>
-            <a:off x="8721420" y="4342249"/>
-            <a:ext cx="3042872" cy="1794526"/>
-          </a:xfrm>
-          <a:prstGeom prst="rect">
-            <a:avLst/>
-          </a:prstGeom>
-          <a:solidFill>
-            <a:srgbClr val="FFFFFF"/>
-          </a:solidFill>
-          <a:ln w="12700">
-            <a:solidFill>
-              <a:srgbClr val="E8EFF8"/>
-            </a:solidFill>
-            <a:prstDash val="solid"/>
-          </a:ln>
-        </p:spPr>
-        <p:txBody>
-          <a:bodyPr/>
-          <a:lstStyle/>
-          <a:p>
-            <a:endParaRPr lang="ko-KR" altLang="en-US" dirty="0"/>
-          </a:p>
-        </p:txBody>
-      </p:sp>
-      <p:grpSp>
-        <p:nvGrpSpPr>
-          <p:cNvPr id="5" name="그룹 4">
-            <a:extLst>
-              <a:ext uri="{FF2B5EF4-FFF2-40B4-BE49-F238E27FC236}">
-                <a16:creationId xmlns:a16="http://schemas.microsoft.com/office/drawing/2014/main" id="{AA2DF70F-2D85-4641-8761-9B769254C45B}"/>
-              </a:ext>
-            </a:extLst>
-          </p:cNvPr>
-          <p:cNvGrpSpPr/>
-          <p:nvPr/>
-        </p:nvGrpSpPr>
-        <p:grpSpPr>
-          <a:xfrm>
-            <a:off x="420211" y="1622411"/>
-            <a:ext cx="11336724" cy="2950655"/>
-            <a:chOff x="427567" y="1051558"/>
-            <a:chExt cx="11336724" cy="2950655"/>
-          </a:xfrm>
-        </p:grpSpPr>
-        <p:sp>
-          <p:nvSpPr>
-            <p:cNvPr id="119" name="Shape 2">
-              <a:extLst>
-                <a:ext uri="{FF2B5EF4-FFF2-40B4-BE49-F238E27FC236}">
-                  <a16:creationId xmlns:a16="http://schemas.microsoft.com/office/drawing/2014/main" id="{22583696-47DF-49A9-8D07-DE9E24EDE6FD}"/>
-                </a:ext>
-              </a:extLst>
-            </p:cNvPr>
-            <p:cNvSpPr/>
-            <p:nvPr/>
-          </p:nvSpPr>
-          <p:spPr>
-            <a:xfrm>
-              <a:off x="427567" y="1051558"/>
-              <a:ext cx="3531111" cy="2950655"/>
-            </a:xfrm>
-            <a:prstGeom prst="rect">
-              <a:avLst/>
-            </a:prstGeom>
-            <a:solidFill>
-              <a:srgbClr val="1E4DA0"/>
-            </a:solidFill>
-            <a:ln w="12700">
-              <a:solidFill>
-                <a:srgbClr val="1E4DA0"/>
-              </a:solidFill>
-              <a:prstDash val="solid"/>
-            </a:ln>
-          </p:spPr>
-        </p:sp>
-        <p:sp>
-          <p:nvSpPr>
-            <p:cNvPr id="120" name="Text 3">
-              <a:extLst>
-                <a:ext uri="{FF2B5EF4-FFF2-40B4-BE49-F238E27FC236}">
-                  <a16:creationId xmlns:a16="http://schemas.microsoft.com/office/drawing/2014/main" id="{32FD91BA-2B0C-430C-893E-C784BC75B507}"/>
-                </a:ext>
-              </a:extLst>
-            </p:cNvPr>
-            <p:cNvSpPr/>
-            <p:nvPr/>
-          </p:nvSpPr>
-          <p:spPr>
-            <a:xfrm>
-              <a:off x="551466" y="1118618"/>
-              <a:ext cx="3283314" cy="509659"/>
-            </a:xfrm>
-            <a:prstGeom prst="rect">
-              <a:avLst/>
-            </a:prstGeom>
-            <a:noFill/>
-            <a:ln/>
-          </p:spPr>
-          <p:txBody>
-            <a:bodyPr wrap="square" rtlCol="0" anchor="ctr"/>
-            <a:lstStyle/>
-            <a:p>
-              <a:pPr marL="0" indent="0" algn="ctr">
-                <a:buNone/>
-              </a:pPr>
-              <a:r>
-                <a:rPr lang="en-US" sz="2000" b="1" kern="0" spc="100" dirty="0">
-                  <a:solidFill>
-                    <a:srgbClr val="CADCFC"/>
-                  </a:solidFill>
-                  <a:latin typeface="맑은 고딕" panose="020B0503020000020004" pitchFamily="50" charset="-127"/>
-                  <a:ea typeface="맑은 고딕" panose="020B0503020000020004" pitchFamily="50" charset="-127"/>
-                  <a:cs typeface="Calibri" pitchFamily="34" charset="-120"/>
-                </a:rPr>
-                <a:t>프론트엔드</a:t>
-              </a:r>
-              <a:endParaRPr lang="en-US" sz="2000" dirty="0">
-                <a:latin typeface="맑은 고딕" panose="020B0503020000020004" pitchFamily="50" charset="-127"/>
-              </a:endParaRPr>
-            </a:p>
-          </p:txBody>
-        </p:sp>
-        <p:sp>
-          <p:nvSpPr>
-            <p:cNvPr id="121" name="Text 4">
-              <a:extLst>
-                <a:ext uri="{FF2B5EF4-FFF2-40B4-BE49-F238E27FC236}">
-                  <a16:creationId xmlns:a16="http://schemas.microsoft.com/office/drawing/2014/main" id="{C5779E57-EE3B-4419-A2BE-351237376CB3}"/>
-                </a:ext>
-              </a:extLst>
-            </p:cNvPr>
-            <p:cNvSpPr/>
-            <p:nvPr/>
-          </p:nvSpPr>
-          <p:spPr>
-            <a:xfrm>
-              <a:off x="551466" y="1614865"/>
-              <a:ext cx="3283314" cy="563307"/>
-            </a:xfrm>
-            <a:prstGeom prst="rect">
-              <a:avLst/>
-            </a:prstGeom>
-            <a:noFill/>
-            <a:ln/>
-          </p:spPr>
-          <p:txBody>
-            <a:bodyPr wrap="square" rtlCol="0" anchor="ctr"/>
-            <a:lstStyle/>
-            <a:p>
-              <a:pPr marL="0" indent="0" algn="ctr">
-                <a:buNone/>
-              </a:pPr>
-              <a:r>
-                <a:rPr lang="en-US" sz="2000" b="1" dirty="0">
-                  <a:solidFill>
-                    <a:srgbClr val="FFFFFF"/>
-                  </a:solidFill>
-                  <a:latin typeface="맑은 고딕" panose="020B0503020000020004" pitchFamily="50" charset="-127"/>
-                  <a:ea typeface="맑은 고딕" panose="020B0503020000020004" pitchFamily="50" charset="-127"/>
-                  <a:cs typeface="Calibri" pitchFamily="34" charset="-120"/>
-                </a:rPr>
-                <a:t>React + Vite</a:t>
-              </a:r>
-              <a:endParaRPr lang="en-US" sz="2000" dirty="0">
-                <a:latin typeface="맑은 고딕" panose="020B0503020000020004" pitchFamily="50" charset="-127"/>
-              </a:endParaRPr>
-            </a:p>
-          </p:txBody>
-        </p:sp>
-        <p:sp>
-          <p:nvSpPr>
-            <p:cNvPr id="122" name="Shape 5">
-              <a:extLst>
-                <a:ext uri="{FF2B5EF4-FFF2-40B4-BE49-F238E27FC236}">
-                  <a16:creationId xmlns:a16="http://schemas.microsoft.com/office/drawing/2014/main" id="{40E185AE-BB9A-4458-B1D1-B761ACBE58ED}"/>
-                </a:ext>
-              </a:extLst>
-            </p:cNvPr>
-            <p:cNvSpPr/>
-            <p:nvPr/>
-          </p:nvSpPr>
-          <p:spPr>
-            <a:xfrm>
-              <a:off x="923161" y="2204996"/>
-              <a:ext cx="2539922" cy="26824"/>
-            </a:xfrm>
-            <a:prstGeom prst="rect">
-              <a:avLst/>
-            </a:prstGeom>
-            <a:solidFill>
-              <a:srgbClr val="7EB3FF">
-                <a:alpha val="50000"/>
-              </a:srgbClr>
-            </a:solidFill>
-            <a:ln w="12700">
-              <a:solidFill>
-                <a:srgbClr val="7EB3FF">
-                  <a:alpha val="50000"/>
-                </a:srgbClr>
-              </a:solidFill>
-              <a:prstDash val="solid"/>
-            </a:ln>
-          </p:spPr>
-        </p:sp>
-        <p:sp>
-          <p:nvSpPr>
-            <p:cNvPr id="123" name="Text 6">
-              <a:extLst>
-                <a:ext uri="{FF2B5EF4-FFF2-40B4-BE49-F238E27FC236}">
-                  <a16:creationId xmlns:a16="http://schemas.microsoft.com/office/drawing/2014/main" id="{36A200EE-BF9F-4982-88C3-F10A0D71B121}"/>
-                </a:ext>
-              </a:extLst>
-            </p:cNvPr>
-            <p:cNvSpPr/>
-            <p:nvPr/>
-          </p:nvSpPr>
-          <p:spPr>
-            <a:xfrm>
-              <a:off x="551466" y="2325704"/>
-              <a:ext cx="3283314" cy="761935"/>
-            </a:xfrm>
-            <a:prstGeom prst="rect">
-              <a:avLst/>
-            </a:prstGeom>
-            <a:noFill/>
-            <a:ln/>
-          </p:spPr>
-          <p:txBody>
-            <a:bodyPr wrap="square" rtlCol="0" anchor="ctr"/>
-            <a:lstStyle/>
-            <a:p>
-              <a:pPr algn="ctr">
-                <a:lnSpc>
-                  <a:spcPct val="150000"/>
-                </a:lnSpc>
-              </a:pPr>
-              <a:r>
-                <a:rPr lang="ko-KR" altLang="en-US" sz="1600" dirty="0">
-                  <a:solidFill>
-                    <a:srgbClr val="CADCFC"/>
-                  </a:solidFill>
-                  <a:latin typeface="맑은 고딕" panose="020B0503020000020004" pitchFamily="50" charset="-127"/>
-                  <a:ea typeface="맑은 고딕" panose="020B0503020000020004" pitchFamily="50" charset="-127"/>
-                  <a:cs typeface="Calibri" pitchFamily="34" charset="-120"/>
-                </a:rPr>
-                <a:t>팝업 </a:t>
-              </a:r>
-              <a:r>
-                <a:rPr lang="en-US" altLang="ko-KR" sz="1600" dirty="0">
-                  <a:solidFill>
-                    <a:srgbClr val="CADCFC"/>
-                  </a:solidFill>
-                  <a:latin typeface="맑은 고딕" panose="020B0503020000020004" pitchFamily="50" charset="-127"/>
-                  <a:ea typeface="맑은 고딕" panose="020B0503020000020004" pitchFamily="50" charset="-127"/>
-                  <a:cs typeface="Calibri" pitchFamily="34" charset="-120"/>
-                </a:rPr>
-                <a:t>UI </a:t>
-              </a:r>
-              <a:r>
-                <a:rPr lang="en-US" altLang="ko-KR" sz="1600" dirty="0">
-                  <a:solidFill>
-                    <a:srgbClr val="CADCFC"/>
-                  </a:solidFill>
-                  <a:latin typeface="맑은 고딕" panose="020B0503020000020004" pitchFamily="50" charset="-127"/>
-                  <a:cs typeface="Calibri" pitchFamily="34" charset="-120"/>
-                </a:rPr>
-                <a:t>· </a:t>
-              </a:r>
-              <a:r>
-                <a:rPr lang="ko-KR" altLang="en-US" sz="1600" dirty="0">
-                  <a:solidFill>
-                    <a:srgbClr val="CADCFC"/>
-                  </a:solidFill>
-                  <a:latin typeface="맑은 고딕" panose="020B0503020000020004" pitchFamily="50" charset="-127"/>
-                  <a:ea typeface="맑은 고딕" panose="020B0503020000020004" pitchFamily="50" charset="-127"/>
-                  <a:cs typeface="Calibri" pitchFamily="34" charset="-120"/>
-                </a:rPr>
-                <a:t>필터 탭</a:t>
-              </a:r>
-              <a:endParaRPr lang="en-US" altLang="ko-KR" sz="1600" dirty="0">
-                <a:solidFill>
-                  <a:srgbClr val="CADCFC"/>
-                </a:solidFill>
-                <a:latin typeface="맑은 고딕" panose="020B0503020000020004" pitchFamily="50" charset="-127"/>
-                <a:ea typeface="맑은 고딕" panose="020B0503020000020004" pitchFamily="50" charset="-127"/>
-                <a:cs typeface="Calibri" pitchFamily="34" charset="-120"/>
-              </a:endParaRPr>
-            </a:p>
-            <a:p>
-              <a:pPr marL="0" indent="0" algn="ctr">
-                <a:lnSpc>
-                  <a:spcPct val="150000"/>
-                </a:lnSpc>
-                <a:buNone/>
-              </a:pPr>
-              <a:r>
-                <a:rPr lang="ko-KR" altLang="en-US" sz="1600" dirty="0">
-                  <a:solidFill>
-                    <a:srgbClr val="CADCFC"/>
-                  </a:solidFill>
-                  <a:latin typeface="맑은 고딕" panose="020B0503020000020004" pitchFamily="50" charset="-127"/>
-                  <a:ea typeface="맑은 고딕" panose="020B0503020000020004" pitchFamily="50" charset="-127"/>
-                  <a:cs typeface="Calibri" pitchFamily="34" charset="-120"/>
-                </a:rPr>
-                <a:t>경고 배너 컴포넌트</a:t>
-              </a:r>
-              <a:endParaRPr lang="en-US" altLang="ko-KR" sz="1600" dirty="0">
-                <a:solidFill>
-                  <a:srgbClr val="CADCFC"/>
-                </a:solidFill>
-                <a:latin typeface="맑은 고딕" panose="020B0503020000020004" pitchFamily="50" charset="-127"/>
-                <a:ea typeface="맑은 고딕" panose="020B0503020000020004" pitchFamily="50" charset="-127"/>
-                <a:cs typeface="Calibri" pitchFamily="34" charset="-120"/>
-              </a:endParaRPr>
-            </a:p>
-          </p:txBody>
-        </p:sp>
-        <p:sp>
-          <p:nvSpPr>
-            <p:cNvPr id="125" name="Shape 8">
-              <a:extLst>
-                <a:ext uri="{FF2B5EF4-FFF2-40B4-BE49-F238E27FC236}">
-                  <a16:creationId xmlns:a16="http://schemas.microsoft.com/office/drawing/2014/main" id="{15E65BF5-14DA-48BC-996B-76FB138243EA}"/>
-                </a:ext>
-              </a:extLst>
-            </p:cNvPr>
-            <p:cNvSpPr/>
-            <p:nvPr/>
-          </p:nvSpPr>
-          <p:spPr>
-            <a:xfrm>
-              <a:off x="4330374" y="1051558"/>
-              <a:ext cx="3531111" cy="2950655"/>
-            </a:xfrm>
-            <a:prstGeom prst="rect">
-              <a:avLst/>
-            </a:prstGeom>
-            <a:solidFill>
-              <a:srgbClr val="0D2D6B"/>
-            </a:solidFill>
-            <a:ln w="12700">
-              <a:solidFill>
-                <a:srgbClr val="0D2D6B"/>
-              </a:solidFill>
-              <a:prstDash val="solid"/>
-            </a:ln>
-          </p:spPr>
-        </p:sp>
-        <p:sp>
-          <p:nvSpPr>
-            <p:cNvPr id="126" name="Text 9">
-              <a:extLst>
-                <a:ext uri="{FF2B5EF4-FFF2-40B4-BE49-F238E27FC236}">
-                  <a16:creationId xmlns:a16="http://schemas.microsoft.com/office/drawing/2014/main" id="{2D3EAFA2-3A03-4491-8501-1ED383C4D84D}"/>
-                </a:ext>
-              </a:extLst>
-            </p:cNvPr>
-            <p:cNvSpPr/>
-            <p:nvPr/>
-          </p:nvSpPr>
-          <p:spPr>
-            <a:xfrm>
-              <a:off x="4454272" y="1118618"/>
-              <a:ext cx="3283314" cy="509659"/>
-            </a:xfrm>
-            <a:prstGeom prst="rect">
-              <a:avLst/>
-            </a:prstGeom>
-            <a:noFill/>
-            <a:ln/>
-          </p:spPr>
-          <p:txBody>
-            <a:bodyPr wrap="square" rtlCol="0" anchor="ctr"/>
-            <a:lstStyle/>
-            <a:p>
-              <a:pPr marL="0" indent="0" algn="ctr">
-                <a:buNone/>
-              </a:pPr>
-              <a:r>
-                <a:rPr lang="en-US" sz="2000" b="1" kern="0" spc="100" dirty="0">
-                  <a:solidFill>
-                    <a:srgbClr val="CADCFC"/>
-                  </a:solidFill>
-                  <a:latin typeface="맑은 고딕" panose="020B0503020000020004" pitchFamily="50" charset="-127"/>
-                  <a:ea typeface="맑은 고딕" panose="020B0503020000020004" pitchFamily="50" charset="-127"/>
-                  <a:cs typeface="Calibri" pitchFamily="34" charset="-120"/>
-                </a:rPr>
-                <a:t>백엔드 서버</a:t>
-              </a:r>
-              <a:endParaRPr lang="en-US" sz="2000" dirty="0">
-                <a:latin typeface="맑은 고딕" panose="020B0503020000020004" pitchFamily="50" charset="-127"/>
-              </a:endParaRPr>
-            </a:p>
-          </p:txBody>
-        </p:sp>
-        <p:sp>
-          <p:nvSpPr>
-            <p:cNvPr id="127" name="Text 10">
-              <a:extLst>
-                <a:ext uri="{FF2B5EF4-FFF2-40B4-BE49-F238E27FC236}">
-                  <a16:creationId xmlns:a16="http://schemas.microsoft.com/office/drawing/2014/main" id="{1ABF7A3A-07BA-4CD2-9953-B568C368CDA1}"/>
-                </a:ext>
-              </a:extLst>
-            </p:cNvPr>
-            <p:cNvSpPr/>
-            <p:nvPr/>
-          </p:nvSpPr>
-          <p:spPr>
-            <a:xfrm>
-              <a:off x="4454272" y="1614865"/>
-              <a:ext cx="3283314" cy="563307"/>
-            </a:xfrm>
-            <a:prstGeom prst="rect">
-              <a:avLst/>
-            </a:prstGeom>
-            <a:noFill/>
-            <a:ln/>
-          </p:spPr>
-          <p:txBody>
-            <a:bodyPr wrap="square" rtlCol="0" anchor="ctr"/>
-            <a:lstStyle/>
-            <a:p>
-              <a:pPr marL="0" indent="0" algn="ctr">
-                <a:buNone/>
-              </a:pPr>
-              <a:r>
-                <a:rPr lang="en-US" sz="2000" b="1" dirty="0">
-                  <a:solidFill>
-                    <a:srgbClr val="FFFFFF"/>
-                  </a:solidFill>
-                  <a:latin typeface="맑은 고딕" panose="020B0503020000020004" pitchFamily="50" charset="-127"/>
-                  <a:ea typeface="맑은 고딕" panose="020B0503020000020004" pitchFamily="50" charset="-127"/>
-                  <a:cs typeface="Calibri" pitchFamily="34" charset="-120"/>
-                </a:rPr>
-                <a:t>Node.js + Express</a:t>
-              </a:r>
-              <a:endParaRPr lang="en-US" sz="2000" dirty="0">
-                <a:latin typeface="맑은 고딕" panose="020B0503020000020004" pitchFamily="50" charset="-127"/>
-              </a:endParaRPr>
-            </a:p>
-          </p:txBody>
-        </p:sp>
-        <p:sp>
-          <p:nvSpPr>
-            <p:cNvPr id="128" name="Shape 11">
-              <a:extLst>
-                <a:ext uri="{FF2B5EF4-FFF2-40B4-BE49-F238E27FC236}">
-                  <a16:creationId xmlns:a16="http://schemas.microsoft.com/office/drawing/2014/main" id="{1C951FD9-F55A-4E57-A046-E8B9865A7F00}"/>
-                </a:ext>
-              </a:extLst>
-            </p:cNvPr>
-            <p:cNvSpPr/>
-            <p:nvPr/>
-          </p:nvSpPr>
-          <p:spPr>
-            <a:xfrm>
-              <a:off x="4825968" y="2204996"/>
-              <a:ext cx="2539922" cy="26824"/>
-            </a:xfrm>
-            <a:prstGeom prst="rect">
-              <a:avLst/>
-            </a:prstGeom>
-            <a:solidFill>
-              <a:srgbClr val="7EB3FF">
-                <a:alpha val="50000"/>
-              </a:srgbClr>
-            </a:solidFill>
-            <a:ln w="12700">
-              <a:solidFill>
-                <a:srgbClr val="7EB3FF">
-                  <a:alpha val="50000"/>
-                </a:srgbClr>
-              </a:solidFill>
-              <a:prstDash val="solid"/>
-            </a:ln>
-          </p:spPr>
-        </p:sp>
-        <p:sp>
-          <p:nvSpPr>
-            <p:cNvPr id="129" name="Text 12">
-              <a:extLst>
-                <a:ext uri="{FF2B5EF4-FFF2-40B4-BE49-F238E27FC236}">
-                  <a16:creationId xmlns:a16="http://schemas.microsoft.com/office/drawing/2014/main" id="{25558F41-42DC-4CCC-B2D5-3E213948AFCC}"/>
-                </a:ext>
-              </a:extLst>
-            </p:cNvPr>
-            <p:cNvSpPr/>
-            <p:nvPr/>
-          </p:nvSpPr>
-          <p:spPr>
-            <a:xfrm>
-              <a:off x="4454272" y="2325704"/>
-              <a:ext cx="3283314" cy="761935"/>
-            </a:xfrm>
-            <a:prstGeom prst="rect">
-              <a:avLst/>
-            </a:prstGeom>
-            <a:noFill/>
-            <a:ln/>
-          </p:spPr>
-          <p:txBody>
-            <a:bodyPr wrap="square" rtlCol="0" anchor="ctr"/>
-            <a:lstStyle/>
-            <a:p>
-              <a:pPr marL="0" indent="0" algn="ctr">
-                <a:lnSpc>
-                  <a:spcPct val="150000"/>
-                </a:lnSpc>
-                <a:buNone/>
-              </a:pPr>
-              <a:r>
-                <a:rPr lang="en-US" sz="1600" dirty="0">
-                  <a:solidFill>
-                    <a:schemeClr val="bg1"/>
-                  </a:solidFill>
-                  <a:latin typeface="맑은 고딕" panose="020B0503020000020004" pitchFamily="50" charset="-127"/>
-                </a:rPr>
-                <a:t>DUR </a:t>
-              </a:r>
-              <a:r>
-                <a:rPr lang="ko-KR" altLang="en-US" sz="1600" dirty="0">
-                  <a:solidFill>
-                    <a:schemeClr val="bg1"/>
-                  </a:solidFill>
-                  <a:latin typeface="맑은 고딕" panose="020B0503020000020004" pitchFamily="50" charset="-127"/>
-                </a:rPr>
-                <a:t>데이터 파싱</a:t>
-              </a:r>
-              <a:endParaRPr lang="en-US" altLang="ko-KR" sz="1600" dirty="0">
-                <a:solidFill>
-                  <a:schemeClr val="bg1"/>
-                </a:solidFill>
-                <a:latin typeface="맑은 고딕" panose="020B0503020000020004" pitchFamily="50" charset="-127"/>
-              </a:endParaRPr>
-            </a:p>
-            <a:p>
-              <a:pPr algn="ctr">
-                <a:lnSpc>
-                  <a:spcPct val="150000"/>
-                </a:lnSpc>
-              </a:pPr>
-              <a:r>
-                <a:rPr lang="ko-KR" altLang="en-US" sz="1600" dirty="0">
-                  <a:solidFill>
-                    <a:schemeClr val="bg1"/>
-                  </a:solidFill>
-                  <a:latin typeface="맑은 고딕" panose="020B0503020000020004" pitchFamily="50" charset="-127"/>
-                </a:rPr>
-                <a:t>요청 중계 </a:t>
-              </a:r>
-              <a:r>
-                <a:rPr lang="en-US" altLang="ko-KR" sz="1600" dirty="0">
-                  <a:solidFill>
-                    <a:schemeClr val="bg1"/>
-                  </a:solidFill>
-                  <a:latin typeface="맑은 고딕" panose="020B0503020000020004" pitchFamily="50" charset="-127"/>
-                </a:rPr>
-                <a:t>· </a:t>
-              </a:r>
-              <a:r>
-                <a:rPr lang="ko-KR" altLang="en-US" sz="1600" dirty="0">
-                  <a:solidFill>
-                    <a:schemeClr val="bg1"/>
-                  </a:solidFill>
-                  <a:latin typeface="맑은 고딕" panose="020B0503020000020004" pitchFamily="50" charset="-127"/>
-                </a:rPr>
-                <a:t>인증 처리</a:t>
-              </a:r>
-              <a:endParaRPr lang="en-US" altLang="ko-KR" sz="1600" dirty="0">
-                <a:solidFill>
-                  <a:schemeClr val="bg1"/>
-                </a:solidFill>
-                <a:latin typeface="맑은 고딕" panose="020B0503020000020004" pitchFamily="50" charset="-127"/>
-              </a:endParaRPr>
-            </a:p>
-          </p:txBody>
-        </p:sp>
-        <p:sp>
-          <p:nvSpPr>
-            <p:cNvPr id="131" name="Shape 14">
-              <a:extLst>
-                <a:ext uri="{FF2B5EF4-FFF2-40B4-BE49-F238E27FC236}">
-                  <a16:creationId xmlns:a16="http://schemas.microsoft.com/office/drawing/2014/main" id="{390155DC-6F8E-4D94-AF60-2B5CB36A50C4}"/>
-                </a:ext>
-              </a:extLst>
-            </p:cNvPr>
-            <p:cNvSpPr/>
-            <p:nvPr/>
-          </p:nvSpPr>
-          <p:spPr>
-            <a:xfrm>
-              <a:off x="8233180" y="1051558"/>
-              <a:ext cx="3531111" cy="2950655"/>
-            </a:xfrm>
-            <a:prstGeom prst="rect">
-              <a:avLst/>
-            </a:prstGeom>
-            <a:solidFill>
-              <a:srgbClr val="081A45"/>
-            </a:solidFill>
-            <a:ln w="12700">
-              <a:solidFill>
-                <a:srgbClr val="081A45"/>
-              </a:solidFill>
-              <a:prstDash val="solid"/>
-            </a:ln>
-          </p:spPr>
-        </p:sp>
-        <p:sp>
-          <p:nvSpPr>
-            <p:cNvPr id="132" name="Text 15">
-              <a:extLst>
-                <a:ext uri="{FF2B5EF4-FFF2-40B4-BE49-F238E27FC236}">
-                  <a16:creationId xmlns:a16="http://schemas.microsoft.com/office/drawing/2014/main" id="{7327F504-0D6A-4F41-B32B-B0CA8F72E1A1}"/>
-                </a:ext>
-              </a:extLst>
-            </p:cNvPr>
-            <p:cNvSpPr/>
-            <p:nvPr/>
-          </p:nvSpPr>
-          <p:spPr>
-            <a:xfrm>
-              <a:off x="8357079" y="1118618"/>
-              <a:ext cx="3283314" cy="509659"/>
-            </a:xfrm>
-            <a:prstGeom prst="rect">
-              <a:avLst/>
-            </a:prstGeom>
-            <a:noFill/>
-            <a:ln/>
-          </p:spPr>
-          <p:txBody>
-            <a:bodyPr wrap="square" rtlCol="0" anchor="ctr"/>
-            <a:lstStyle/>
-            <a:p>
-              <a:pPr marL="0" indent="0" algn="ctr">
-                <a:buNone/>
-              </a:pPr>
-              <a:r>
-                <a:rPr lang="en-US" sz="2000" b="1" kern="0" spc="100" dirty="0">
-                  <a:solidFill>
-                    <a:srgbClr val="CADCFC"/>
-                  </a:solidFill>
-                  <a:latin typeface="맑은 고딕" panose="020B0503020000020004" pitchFamily="50" charset="-127"/>
-                  <a:ea typeface="맑은 고딕" panose="020B0503020000020004" pitchFamily="50" charset="-127"/>
-                  <a:cs typeface="Calibri" pitchFamily="34" charset="-120"/>
-                </a:rPr>
-                <a:t>AI</a:t>
-              </a:r>
-              <a:endParaRPr lang="en-US" sz="2000" dirty="0">
-                <a:latin typeface="맑은 고딕" panose="020B0503020000020004" pitchFamily="50" charset="-127"/>
-              </a:endParaRPr>
-            </a:p>
-          </p:txBody>
-        </p:sp>
-        <p:sp>
-          <p:nvSpPr>
-            <p:cNvPr id="133" name="Text 16">
-              <a:extLst>
-                <a:ext uri="{FF2B5EF4-FFF2-40B4-BE49-F238E27FC236}">
-                  <a16:creationId xmlns:a16="http://schemas.microsoft.com/office/drawing/2014/main" id="{58D62C0A-BCA8-41D2-9848-5C9C82632968}"/>
-                </a:ext>
-              </a:extLst>
-            </p:cNvPr>
-            <p:cNvSpPr/>
-            <p:nvPr/>
-          </p:nvSpPr>
-          <p:spPr>
-            <a:xfrm>
-              <a:off x="8357079" y="1614865"/>
-              <a:ext cx="3283314" cy="563307"/>
-            </a:xfrm>
-            <a:prstGeom prst="rect">
-              <a:avLst/>
-            </a:prstGeom>
-            <a:noFill/>
-            <a:ln/>
-          </p:spPr>
-          <p:txBody>
-            <a:bodyPr wrap="square" rtlCol="0" anchor="ctr"/>
-            <a:lstStyle/>
-            <a:p>
-              <a:pPr marL="0" indent="0" algn="ctr">
-                <a:buNone/>
-              </a:pPr>
-              <a:r>
-                <a:rPr lang="en-US" sz="2000" b="1" dirty="0">
-                  <a:solidFill>
-                    <a:srgbClr val="FFFFFF"/>
-                  </a:solidFill>
-                  <a:latin typeface="맑은 고딕" panose="020B0503020000020004" pitchFamily="50" charset="-127"/>
-                  <a:ea typeface="맑은 고딕" panose="020B0503020000020004" pitchFamily="50" charset="-127"/>
-                  <a:cs typeface="Calibri" pitchFamily="34" charset="-120"/>
-                </a:rPr>
-                <a:t>Claude API (Bedrock)</a:t>
-              </a:r>
-              <a:endParaRPr lang="en-US" sz="2000" dirty="0">
-                <a:latin typeface="맑은 고딕" panose="020B0503020000020004" pitchFamily="50" charset="-127"/>
-              </a:endParaRPr>
-            </a:p>
-          </p:txBody>
-        </p:sp>
-        <p:sp>
-          <p:nvSpPr>
-            <p:cNvPr id="134" name="Shape 17">
-              <a:extLst>
-                <a:ext uri="{FF2B5EF4-FFF2-40B4-BE49-F238E27FC236}">
-                  <a16:creationId xmlns:a16="http://schemas.microsoft.com/office/drawing/2014/main" id="{ACB5DB9D-2166-4E05-84CC-95667C5AD5D3}"/>
-                </a:ext>
-              </a:extLst>
-            </p:cNvPr>
-            <p:cNvSpPr/>
-            <p:nvPr/>
-          </p:nvSpPr>
-          <p:spPr>
-            <a:xfrm>
-              <a:off x="8728775" y="2204996"/>
-              <a:ext cx="2539922" cy="26824"/>
-            </a:xfrm>
-            <a:prstGeom prst="rect">
-              <a:avLst/>
-            </a:prstGeom>
-            <a:solidFill>
-              <a:srgbClr val="7EB3FF">
-                <a:alpha val="50000"/>
-              </a:srgbClr>
-            </a:solidFill>
-            <a:ln w="12700">
-              <a:solidFill>
-                <a:srgbClr val="7EB3FF">
-                  <a:alpha val="50000"/>
-                </a:srgbClr>
-              </a:solidFill>
-              <a:prstDash val="solid"/>
-            </a:ln>
-          </p:spPr>
-        </p:sp>
-        <p:sp>
-          <p:nvSpPr>
-            <p:cNvPr id="135" name="Text 18">
-              <a:extLst>
-                <a:ext uri="{FF2B5EF4-FFF2-40B4-BE49-F238E27FC236}">
-                  <a16:creationId xmlns:a16="http://schemas.microsoft.com/office/drawing/2014/main" id="{809736DD-2892-4DFE-AC54-C4916A2F2146}"/>
-                </a:ext>
-              </a:extLst>
-            </p:cNvPr>
-            <p:cNvSpPr/>
-            <p:nvPr/>
-          </p:nvSpPr>
-          <p:spPr>
-            <a:xfrm>
-              <a:off x="8357079" y="2325704"/>
-              <a:ext cx="3283314" cy="1189421"/>
-            </a:xfrm>
-            <a:prstGeom prst="rect">
-              <a:avLst/>
-            </a:prstGeom>
-            <a:noFill/>
-            <a:ln/>
-          </p:spPr>
-          <p:txBody>
-            <a:bodyPr wrap="square" rtlCol="0" anchor="ctr"/>
-            <a:lstStyle/>
-            <a:p>
-              <a:pPr marL="0" indent="0" algn="ctr">
-                <a:lnSpc>
-                  <a:spcPct val="150000"/>
-                </a:lnSpc>
-                <a:buNone/>
-              </a:pPr>
-              <a:r>
-                <a:rPr lang="ko-KR" altLang="en-US" sz="1600" dirty="0">
-                  <a:solidFill>
-                    <a:srgbClr val="CADCFC"/>
-                  </a:solidFill>
-                  <a:latin typeface="맑은 고딕" panose="020B0503020000020004" pitchFamily="50" charset="-127"/>
-                  <a:ea typeface="맑은 고딕" panose="020B0503020000020004" pitchFamily="50" charset="-127"/>
-                  <a:cs typeface="Calibri" pitchFamily="34" charset="-120"/>
-                </a:rPr>
-                <a:t>처방 이력 자동 분류</a:t>
-              </a:r>
-              <a:endParaRPr lang="en-US" altLang="ko-KR" sz="1600" dirty="0">
-                <a:solidFill>
-                  <a:srgbClr val="CADCFC"/>
-                </a:solidFill>
-                <a:latin typeface="맑은 고딕" panose="020B0503020000020004" pitchFamily="50" charset="-127"/>
-                <a:ea typeface="맑은 고딕" panose="020B0503020000020004" pitchFamily="50" charset="-127"/>
-                <a:cs typeface="Calibri" pitchFamily="34" charset="-120"/>
-              </a:endParaRPr>
-            </a:p>
-            <a:p>
-              <a:pPr marL="0" indent="0" algn="ctr">
-                <a:lnSpc>
-                  <a:spcPct val="150000"/>
-                </a:lnSpc>
-                <a:buNone/>
-              </a:pPr>
-              <a:r>
-                <a:rPr lang="ko-KR" altLang="en-US" sz="1600" dirty="0">
-                  <a:solidFill>
-                    <a:srgbClr val="CADCFC"/>
-                  </a:solidFill>
-                  <a:latin typeface="맑은 고딕" panose="020B0503020000020004" pitchFamily="50" charset="-127"/>
-                  <a:ea typeface="맑은 고딕" panose="020B0503020000020004" pitchFamily="50" charset="-127"/>
-                  <a:cs typeface="Calibri" pitchFamily="34" charset="-120"/>
-                </a:rPr>
-                <a:t>상호작용 패턴 감지</a:t>
-              </a:r>
-              <a:endParaRPr lang="en-US" altLang="ko-KR" sz="1600" dirty="0">
-                <a:solidFill>
-                  <a:srgbClr val="CADCFC"/>
-                </a:solidFill>
-                <a:latin typeface="맑은 고딕" panose="020B0503020000020004" pitchFamily="50" charset="-127"/>
-                <a:ea typeface="맑은 고딕" panose="020B0503020000020004" pitchFamily="50" charset="-127"/>
-                <a:cs typeface="Calibri" pitchFamily="34" charset="-120"/>
-              </a:endParaRPr>
-            </a:p>
-            <a:p>
-              <a:pPr marL="0" indent="0" algn="ctr">
-                <a:lnSpc>
-                  <a:spcPct val="150000"/>
-                </a:lnSpc>
-                <a:buNone/>
-              </a:pPr>
-              <a:r>
-                <a:rPr lang="ko-KR" altLang="en-US" sz="1600" dirty="0">
-                  <a:solidFill>
-                    <a:srgbClr val="CADCFC"/>
-                  </a:solidFill>
-                  <a:latin typeface="맑은 고딕" panose="020B0503020000020004" pitchFamily="50" charset="-127"/>
-                  <a:ea typeface="맑은 고딕" panose="020B0503020000020004" pitchFamily="50" charset="-127"/>
-                  <a:cs typeface="Calibri" pitchFamily="34" charset="-120"/>
-                </a:rPr>
-                <a:t>위험도 등급 산출</a:t>
-              </a:r>
-              <a:endParaRPr lang="en-US" sz="1600" dirty="0">
-                <a:latin typeface="맑은 고딕" panose="020B0503020000020004" pitchFamily="50" charset="-127"/>
-              </a:endParaRPr>
-            </a:p>
-          </p:txBody>
-        </p:sp>
-        <p:sp>
-          <p:nvSpPr>
-            <p:cNvPr id="3" name="화살표: 왼쪽/오른쪽 2">
-              <a:extLst>
-                <a:ext uri="{FF2B5EF4-FFF2-40B4-BE49-F238E27FC236}">
-                  <a16:creationId xmlns:a16="http://schemas.microsoft.com/office/drawing/2014/main" id="{6A41DBAE-EEDA-4B8A-BACA-92E5B4819C44}"/>
-                </a:ext>
-              </a:extLst>
-            </p:cNvPr>
-            <p:cNvSpPr/>
-            <p:nvPr/>
-          </p:nvSpPr>
-          <p:spPr>
-            <a:xfrm>
-              <a:off x="3630347" y="2284569"/>
-              <a:ext cx="1028359" cy="484632"/>
-            </a:xfrm>
-            <a:prstGeom prst="leftRightArrow">
-              <a:avLst>
-                <a:gd name="adj1" fmla="val 63976"/>
-                <a:gd name="adj2" fmla="val 46506"/>
-              </a:avLst>
-            </a:prstGeom>
-            <a:solidFill>
-              <a:srgbClr val="EF9F27"/>
-            </a:solidFill>
-            <a:ln>
-              <a:solidFill>
-                <a:srgbClr val="EF9F27"/>
-              </a:solidFill>
-            </a:ln>
-          </p:spPr>
-          <p:style>
-            <a:lnRef idx="2">
-              <a:schemeClr val="accent1">
-                <a:shade val="50000"/>
-              </a:schemeClr>
-            </a:lnRef>
-            <a:fillRef idx="1">
-              <a:schemeClr val="accent1"/>
-            </a:fillRef>
-            <a:effectRef idx="0">
-              <a:schemeClr val="accent1"/>
-            </a:effectRef>
-            <a:fontRef idx="minor">
-              <a:schemeClr val="lt1"/>
-            </a:fontRef>
-          </p:style>
-          <p:txBody>
-            <a:bodyPr rtlCol="0" anchor="ctr"/>
-            <a:lstStyle/>
-            <a:p>
-              <a:pPr algn="ctr"/>
-              <a:endParaRPr lang="ko-KR" altLang="en-US" dirty="0">
-                <a:latin typeface="맑은 고딕" panose="020B0503020000020004" pitchFamily="50" charset="-127"/>
-                <a:ea typeface="맑은 고딕" panose="020B0503020000020004" pitchFamily="50" charset="-127"/>
-              </a:endParaRPr>
-            </a:p>
-          </p:txBody>
-        </p:sp>
-        <p:sp>
-          <p:nvSpPr>
-            <p:cNvPr id="43" name="화살표: 왼쪽/오른쪽 42">
-              <a:extLst>
-                <a:ext uri="{FF2B5EF4-FFF2-40B4-BE49-F238E27FC236}">
-                  <a16:creationId xmlns:a16="http://schemas.microsoft.com/office/drawing/2014/main" id="{EFE16435-75E4-46F2-8A1A-8B9A3EA70980}"/>
-                </a:ext>
-              </a:extLst>
-            </p:cNvPr>
-            <p:cNvSpPr/>
-            <p:nvPr/>
-          </p:nvSpPr>
-          <p:spPr>
-            <a:xfrm>
-              <a:off x="7533153" y="2279341"/>
-              <a:ext cx="1028359" cy="484632"/>
-            </a:xfrm>
-            <a:prstGeom prst="leftRightArrow">
-              <a:avLst>
-                <a:gd name="adj1" fmla="val 63976"/>
-                <a:gd name="adj2" fmla="val 46506"/>
-              </a:avLst>
-            </a:prstGeom>
-            <a:solidFill>
-              <a:srgbClr val="EF9F27"/>
-            </a:solidFill>
-            <a:ln>
-              <a:solidFill>
-                <a:srgbClr val="EF9F27"/>
-              </a:solidFill>
-            </a:ln>
-          </p:spPr>
-          <p:style>
-            <a:lnRef idx="2">
-              <a:schemeClr val="accent1">
-                <a:shade val="50000"/>
-              </a:schemeClr>
-            </a:lnRef>
-            <a:fillRef idx="1">
-              <a:schemeClr val="accent1"/>
-            </a:fillRef>
-            <a:effectRef idx="0">
-              <a:schemeClr val="accent1"/>
-            </a:effectRef>
-            <a:fontRef idx="minor">
-              <a:schemeClr val="lt1"/>
-            </a:fontRef>
-          </p:style>
-          <p:txBody>
-            <a:bodyPr rtlCol="0" anchor="ctr"/>
-            <a:lstStyle/>
-            <a:p>
-              <a:pPr algn="ctr"/>
-              <a:endParaRPr lang="ko-KR" altLang="en-US" dirty="0">
-                <a:latin typeface="맑은 고딕" panose="020B0503020000020004" pitchFamily="50" charset="-127"/>
-                <a:ea typeface="맑은 고딕" panose="020B0503020000020004" pitchFamily="50" charset="-127"/>
-              </a:endParaRPr>
-            </a:p>
-          </p:txBody>
-        </p:sp>
-      </p:grpSp>
-      <p:grpSp>
-        <p:nvGrpSpPr>
-          <p:cNvPr id="6" name="그룹 5">
-            <a:extLst>
-              <a:ext uri="{FF2B5EF4-FFF2-40B4-BE49-F238E27FC236}">
-                <a16:creationId xmlns:a16="http://schemas.microsoft.com/office/drawing/2014/main" id="{FAA63103-DF9D-4422-BACB-42BEFC23CB4E}"/>
-              </a:ext>
-            </a:extLst>
-          </p:cNvPr>
-          <p:cNvGrpSpPr/>
-          <p:nvPr/>
-        </p:nvGrpSpPr>
-        <p:grpSpPr>
-          <a:xfrm>
-            <a:off x="8721419" y="4249927"/>
-            <a:ext cx="3035445" cy="1851637"/>
-            <a:chOff x="8047330" y="4351764"/>
-            <a:chExt cx="3716961" cy="1833553"/>
-          </a:xfrm>
-        </p:grpSpPr>
-        <p:sp>
-          <p:nvSpPr>
-            <p:cNvPr id="150" name="Shape 33">
-              <a:extLst>
-                <a:ext uri="{FF2B5EF4-FFF2-40B4-BE49-F238E27FC236}">
-                  <a16:creationId xmlns:a16="http://schemas.microsoft.com/office/drawing/2014/main" id="{4244C628-F921-4894-A869-E75A2E80BDF1}"/>
-                </a:ext>
-              </a:extLst>
-            </p:cNvPr>
-            <p:cNvSpPr/>
-            <p:nvPr/>
-          </p:nvSpPr>
-          <p:spPr>
-            <a:xfrm>
-              <a:off x="8047330" y="4351764"/>
-              <a:ext cx="3716961" cy="469422"/>
-            </a:xfrm>
-            <a:prstGeom prst="rect">
-              <a:avLst/>
-            </a:prstGeom>
-            <a:solidFill>
-              <a:srgbClr val="1E4DA0"/>
-            </a:solidFill>
-            <a:ln w="12700">
-              <a:solidFill>
-                <a:srgbClr val="1E4DA0"/>
-              </a:solidFill>
-              <a:prstDash val="solid"/>
-            </a:ln>
-          </p:spPr>
-        </p:sp>
-        <p:sp>
-          <p:nvSpPr>
-            <p:cNvPr id="151" name="Text 34">
-              <a:extLst>
-                <a:ext uri="{FF2B5EF4-FFF2-40B4-BE49-F238E27FC236}">
-                  <a16:creationId xmlns:a16="http://schemas.microsoft.com/office/drawing/2014/main" id="{41E4B863-E16A-4EA5-B741-CD22F33A8F67}"/>
-                </a:ext>
-              </a:extLst>
-            </p:cNvPr>
-            <p:cNvSpPr/>
-            <p:nvPr/>
-          </p:nvSpPr>
-          <p:spPr>
-            <a:xfrm>
-              <a:off x="8103640" y="4386010"/>
-              <a:ext cx="3190461" cy="402362"/>
-            </a:xfrm>
-            <a:prstGeom prst="rect">
-              <a:avLst/>
-            </a:prstGeom>
-            <a:noFill/>
-            <a:ln/>
-          </p:spPr>
-          <p:txBody>
-            <a:bodyPr wrap="square" rtlCol="0" anchor="ctr"/>
-            <a:lstStyle/>
-            <a:p>
-              <a:pPr marL="0" indent="0">
-                <a:buNone/>
-              </a:pPr>
-              <a:r>
-                <a:rPr lang="en-US" sz="1400" b="1" dirty="0">
-                  <a:solidFill>
-                    <a:srgbClr val="FFFFFF"/>
-                  </a:solidFill>
-                  <a:latin typeface="맑은 고딕" panose="020B0503020000020004" pitchFamily="50" charset="-127"/>
-                  <a:ea typeface="맑은 고딕" panose="020B0503020000020004" pitchFamily="50" charset="-127"/>
-                  <a:cs typeface="Calibri" pitchFamily="34" charset="-120"/>
-                </a:rPr>
-                <a:t>시스템 프롬프트 구성</a:t>
-              </a:r>
-              <a:endParaRPr lang="en-US" sz="1400" dirty="0">
-                <a:latin typeface="맑은 고딕" panose="020B0503020000020004" pitchFamily="50" charset="-127"/>
-              </a:endParaRPr>
-            </a:p>
-          </p:txBody>
-        </p:sp>
-        <p:sp>
-          <p:nvSpPr>
-            <p:cNvPr id="152" name="Text 35">
-              <a:extLst>
-                <a:ext uri="{FF2B5EF4-FFF2-40B4-BE49-F238E27FC236}">
-                  <a16:creationId xmlns:a16="http://schemas.microsoft.com/office/drawing/2014/main" id="{EB24892E-DCEC-44F5-B0F9-12C97BFE5180}"/>
-                </a:ext>
-              </a:extLst>
-            </p:cNvPr>
-            <p:cNvSpPr/>
-            <p:nvPr/>
-          </p:nvSpPr>
-          <p:spPr>
-            <a:xfrm>
-              <a:off x="8140184" y="4870932"/>
-              <a:ext cx="3438260" cy="308478"/>
-            </a:xfrm>
-            <a:prstGeom prst="rect">
-              <a:avLst/>
-            </a:prstGeom>
-            <a:noFill/>
-            <a:ln/>
-          </p:spPr>
-          <p:txBody>
-            <a:bodyPr wrap="square" rtlCol="0" anchor="ctr"/>
-            <a:lstStyle/>
-            <a:p>
-              <a:pPr marL="0" indent="0">
-                <a:buNone/>
-              </a:pPr>
-              <a:r>
-                <a:rPr lang="en-US" sz="1200" b="1" dirty="0">
-                  <a:solidFill>
-                    <a:srgbClr val="EF9F27"/>
-                  </a:solidFill>
-                  <a:latin typeface="맑은 고딕" panose="020B0503020000020004" pitchFamily="50" charset="-127"/>
-                  <a:ea typeface="맑은 고딕" panose="020B0503020000020004" pitchFamily="50" charset="-127"/>
-                  <a:cs typeface="Calibri" pitchFamily="34" charset="-120"/>
-                </a:rPr>
-                <a:t>▸  </a:t>
-              </a:r>
-              <a:r>
-                <a:rPr lang="en-US" sz="1200" dirty="0">
-                  <a:solidFill>
-                    <a:srgbClr val="363636"/>
-                  </a:solidFill>
-                  <a:latin typeface="맑은 고딕" panose="020B0503020000020004" pitchFamily="50" charset="-127"/>
-                  <a:ea typeface="맑은 고딕" panose="020B0503020000020004" pitchFamily="50" charset="-127"/>
-                  <a:cs typeface="Calibri" pitchFamily="34" charset="-120"/>
-                </a:rPr>
-                <a:t>ATC </a:t>
-              </a:r>
-              <a:r>
-                <a:rPr lang="ko-KR" altLang="en-US" sz="1200" dirty="0">
-                  <a:solidFill>
-                    <a:srgbClr val="363636"/>
-                  </a:solidFill>
-                  <a:latin typeface="맑은 고딕" panose="020B0503020000020004" pitchFamily="50" charset="-127"/>
-                  <a:ea typeface="맑은 고딕" panose="020B0503020000020004" pitchFamily="50" charset="-127"/>
-                  <a:cs typeface="Calibri" pitchFamily="34" charset="-120"/>
-                </a:rPr>
-                <a:t>계통 분류 </a:t>
-              </a:r>
-              <a:r>
-                <a:rPr lang="en-US" sz="1200" dirty="0" err="1">
-                  <a:solidFill>
-                    <a:srgbClr val="363636"/>
-                  </a:solidFill>
-                  <a:latin typeface="맑은 고딕" panose="020B0503020000020004" pitchFamily="50" charset="-127"/>
-                  <a:ea typeface="맑은 고딕" panose="020B0503020000020004" pitchFamily="50" charset="-127"/>
-                  <a:cs typeface="Calibri" pitchFamily="34" charset="-120"/>
-                </a:rPr>
-                <a:t>규칙</a:t>
-              </a:r>
-              <a:r>
-                <a:rPr lang="en-US" sz="1200" dirty="0">
-                  <a:solidFill>
-                    <a:srgbClr val="363636"/>
-                  </a:solidFill>
-                  <a:latin typeface="맑은 고딕" panose="020B0503020000020004" pitchFamily="50" charset="-127"/>
-                  <a:ea typeface="맑은 고딕" panose="020B0503020000020004" pitchFamily="50" charset="-127"/>
-                  <a:cs typeface="Calibri" pitchFamily="34" charset="-120"/>
-                </a:rPr>
-                <a:t> 정의</a:t>
-              </a:r>
-              <a:endParaRPr lang="en-US" sz="1200" dirty="0">
-                <a:latin typeface="맑은 고딕" panose="020B0503020000020004" pitchFamily="50" charset="-127"/>
-              </a:endParaRPr>
-            </a:p>
-          </p:txBody>
-        </p:sp>
-        <p:sp>
-          <p:nvSpPr>
-            <p:cNvPr id="153" name="Text 36">
-              <a:extLst>
-                <a:ext uri="{FF2B5EF4-FFF2-40B4-BE49-F238E27FC236}">
-                  <a16:creationId xmlns:a16="http://schemas.microsoft.com/office/drawing/2014/main" id="{B8D83B83-F9DC-4E44-B686-DB591A32A028}"/>
-                </a:ext>
-              </a:extLst>
-            </p:cNvPr>
-            <p:cNvSpPr/>
-            <p:nvPr/>
-          </p:nvSpPr>
-          <p:spPr>
-            <a:xfrm>
-              <a:off x="8140184" y="5206234"/>
-              <a:ext cx="3438260" cy="308478"/>
-            </a:xfrm>
-            <a:prstGeom prst="rect">
-              <a:avLst/>
-            </a:prstGeom>
-            <a:noFill/>
-            <a:ln/>
-          </p:spPr>
-          <p:txBody>
-            <a:bodyPr wrap="square" rtlCol="0" anchor="ctr"/>
-            <a:lstStyle/>
-            <a:p>
-              <a:pPr marL="0" indent="0">
-                <a:buNone/>
-              </a:pPr>
-              <a:r>
-                <a:rPr lang="en-US" sz="1200" b="1" dirty="0">
-                  <a:solidFill>
-                    <a:srgbClr val="EF9F27"/>
-                  </a:solidFill>
-                  <a:latin typeface="맑은 고딕" panose="020B0503020000020004" pitchFamily="50" charset="-127"/>
-                  <a:ea typeface="맑은 고딕" panose="020B0503020000020004" pitchFamily="50" charset="-127"/>
-                  <a:cs typeface="Calibri" pitchFamily="34" charset="-120"/>
-                </a:rPr>
-                <a:t>▸  </a:t>
-              </a:r>
-              <a:r>
-                <a:rPr lang="en-US" sz="1200" dirty="0">
-                  <a:latin typeface="맑은 고딕" panose="020B0503020000020004" pitchFamily="50" charset="-127"/>
-                  <a:ea typeface="맑은 고딕" panose="020B0503020000020004" pitchFamily="50" charset="-127"/>
-                  <a:cs typeface="Calibri" pitchFamily="34" charset="-120"/>
-                </a:rPr>
-                <a:t>DDI </a:t>
-              </a:r>
-              <a:r>
-                <a:rPr lang="ko-KR" altLang="en-US" sz="1200" dirty="0">
-                  <a:latin typeface="맑은 고딕" panose="020B0503020000020004" pitchFamily="50" charset="-127"/>
-                  <a:ea typeface="맑은 고딕" panose="020B0503020000020004" pitchFamily="50" charset="-127"/>
-                  <a:cs typeface="Calibri" pitchFamily="34" charset="-120"/>
-                </a:rPr>
-                <a:t>위험 등급 판별 로직</a:t>
-              </a:r>
-              <a:endParaRPr lang="en-US" sz="1200" dirty="0">
-                <a:latin typeface="맑은 고딕" panose="020B0503020000020004" pitchFamily="50" charset="-127"/>
-              </a:endParaRPr>
-            </a:p>
-          </p:txBody>
-        </p:sp>
-        <p:sp>
-          <p:nvSpPr>
-            <p:cNvPr id="154" name="Text 37">
-              <a:extLst>
-                <a:ext uri="{FF2B5EF4-FFF2-40B4-BE49-F238E27FC236}">
-                  <a16:creationId xmlns:a16="http://schemas.microsoft.com/office/drawing/2014/main" id="{A4ED2408-14A7-4130-B7E0-B65E26AB64E7}"/>
-                </a:ext>
-              </a:extLst>
-            </p:cNvPr>
-            <p:cNvSpPr/>
-            <p:nvPr/>
-          </p:nvSpPr>
-          <p:spPr>
-            <a:xfrm>
-              <a:off x="8140184" y="5541535"/>
-              <a:ext cx="3438260" cy="308478"/>
-            </a:xfrm>
-            <a:prstGeom prst="rect">
-              <a:avLst/>
-            </a:prstGeom>
-            <a:noFill/>
-            <a:ln/>
-          </p:spPr>
-          <p:txBody>
-            <a:bodyPr wrap="square" rtlCol="0" anchor="ctr"/>
-            <a:lstStyle/>
-            <a:p>
-              <a:pPr marL="0" indent="0">
-                <a:buNone/>
-              </a:pPr>
-              <a:r>
-                <a:rPr lang="en-US" sz="1200" b="1" dirty="0">
-                  <a:solidFill>
-                    <a:srgbClr val="EF9F27"/>
-                  </a:solidFill>
-                  <a:latin typeface="맑은 고딕" panose="020B0503020000020004" pitchFamily="50" charset="-127"/>
-                  <a:ea typeface="맑은 고딕" panose="020B0503020000020004" pitchFamily="50" charset="-127"/>
-                  <a:cs typeface="Calibri" pitchFamily="34" charset="-120"/>
-                </a:rPr>
-                <a:t>▸  </a:t>
-              </a:r>
-              <a:r>
-                <a:rPr lang="ko-KR" altLang="en-US" sz="1200" dirty="0">
-                  <a:solidFill>
-                    <a:srgbClr val="363636"/>
-                  </a:solidFill>
-                  <a:latin typeface="맑은 고딕" panose="020B0503020000020004" pitchFamily="50" charset="-127"/>
-                  <a:ea typeface="맑은 고딕" panose="020B0503020000020004" pitchFamily="50" charset="-127"/>
-                  <a:cs typeface="Calibri" pitchFamily="34" charset="-120"/>
-                </a:rPr>
-                <a:t>기간 용량이상 감지 기준</a:t>
-              </a:r>
-              <a:endParaRPr lang="en-US" sz="1200" dirty="0">
-                <a:latin typeface="맑은 고딕" panose="020B0503020000020004" pitchFamily="50" charset="-127"/>
-              </a:endParaRPr>
-            </a:p>
-          </p:txBody>
-        </p:sp>
-        <p:sp>
-          <p:nvSpPr>
-            <p:cNvPr id="155" name="Text 38">
-              <a:extLst>
-                <a:ext uri="{FF2B5EF4-FFF2-40B4-BE49-F238E27FC236}">
-                  <a16:creationId xmlns:a16="http://schemas.microsoft.com/office/drawing/2014/main" id="{6AD5E3CE-FBD1-43FC-91EC-41E926BB0E5B}"/>
-                </a:ext>
-              </a:extLst>
-            </p:cNvPr>
-            <p:cNvSpPr/>
-            <p:nvPr/>
-          </p:nvSpPr>
-          <p:spPr>
-            <a:xfrm>
-              <a:off x="8140184" y="5876839"/>
-              <a:ext cx="3438260" cy="308478"/>
-            </a:xfrm>
-            <a:prstGeom prst="rect">
-              <a:avLst/>
-            </a:prstGeom>
-            <a:noFill/>
-            <a:ln/>
-          </p:spPr>
-          <p:txBody>
-            <a:bodyPr wrap="square" rtlCol="0" anchor="ctr"/>
-            <a:lstStyle/>
-            <a:p>
-              <a:pPr marL="0" indent="0">
-                <a:buNone/>
-              </a:pPr>
-              <a:r>
-                <a:rPr lang="en-US" sz="1200" b="1" dirty="0">
-                  <a:solidFill>
-                    <a:srgbClr val="EF9F27"/>
-                  </a:solidFill>
-                  <a:latin typeface="맑은 고딕" panose="020B0503020000020004" pitchFamily="50" charset="-127"/>
-                  <a:ea typeface="맑은 고딕" panose="020B0503020000020004" pitchFamily="50" charset="-127"/>
-                  <a:cs typeface="Calibri" pitchFamily="34" charset="-120"/>
-                </a:rPr>
-                <a:t>▸  </a:t>
-              </a:r>
-              <a:r>
-                <a:rPr lang="ko-KR" altLang="en-US" sz="1200" dirty="0">
-                  <a:solidFill>
-                    <a:srgbClr val="363636"/>
-                  </a:solidFill>
-                  <a:latin typeface="맑은 고딕" panose="020B0503020000020004" pitchFamily="50" charset="-127"/>
-                  <a:ea typeface="맑은 고딕" panose="020B0503020000020004" pitchFamily="50" charset="-127"/>
-                  <a:cs typeface="Calibri" pitchFamily="34" charset="-120"/>
-                </a:rPr>
-                <a:t>경고 메시지 포맷 지정</a:t>
-              </a:r>
-              <a:endParaRPr lang="en-US" sz="1200" dirty="0">
-                <a:latin typeface="맑은 고딕" panose="020B0503020000020004" pitchFamily="50" charset="-127"/>
-              </a:endParaRPr>
-            </a:p>
-          </p:txBody>
-        </p:sp>
-      </p:grpSp>
-      <p:sp>
-        <p:nvSpPr>
-          <p:cNvPr id="29" name="TextBox 28">
-            <a:extLst>
-              <a:ext uri="{FF2B5EF4-FFF2-40B4-BE49-F238E27FC236}">
-                <a16:creationId xmlns:a16="http://schemas.microsoft.com/office/drawing/2014/main" id="{D9F34F12-A5A7-4DBB-86C4-E2C2E50E106F}"/>
-              </a:ext>
-            </a:extLst>
-          </p:cNvPr>
-          <p:cNvSpPr txBox="1"/>
-          <p:nvPr/>
-        </p:nvSpPr>
-        <p:spPr>
-          <a:xfrm>
-            <a:off x="420211" y="4614504"/>
-            <a:ext cx="3202780" cy="276999"/>
-          </a:xfrm>
-          <a:prstGeom prst="rect">
-            <a:avLst/>
-          </a:prstGeom>
-          <a:noFill/>
-        </p:spPr>
-        <p:txBody>
-          <a:bodyPr wrap="square" rtlCol="0">
-            <a:spAutoFit/>
-          </a:bodyPr>
-          <a:lstStyle/>
-          <a:p>
-            <a:r>
-              <a:rPr lang="en-US" altLang="ko-KR" sz="1200" b="1" i="1" dirty="0">
-                <a:solidFill>
-                  <a:schemeClr val="tx1">
-                    <a:lumMod val="50000"/>
-                    <a:lumOff val="50000"/>
-                  </a:schemeClr>
-                </a:solidFill>
-                <a:latin typeface="+mn-ea"/>
-              </a:rPr>
-              <a:t>*</a:t>
-            </a:r>
-            <a:r>
-              <a:rPr lang="ko-KR" altLang="en-US" sz="1200" b="1" i="1" dirty="0">
-                <a:solidFill>
-                  <a:schemeClr val="tx1">
-                    <a:lumMod val="50000"/>
-                    <a:lumOff val="50000"/>
-                  </a:schemeClr>
-                </a:solidFill>
-                <a:latin typeface="+mn-ea"/>
-              </a:rPr>
-              <a:t>실제는 </a:t>
-            </a:r>
-            <a:r>
-              <a:rPr lang="ko-KR" altLang="en-US" sz="1200" b="1" i="1" dirty="0" err="1">
-                <a:solidFill>
-                  <a:schemeClr val="tx1">
-                    <a:lumMod val="50000"/>
-                    <a:lumOff val="50000"/>
-                  </a:schemeClr>
-                </a:solidFill>
-                <a:latin typeface="+mn-ea"/>
-              </a:rPr>
-              <a:t>프론트엔드만</a:t>
-            </a:r>
-            <a:r>
-              <a:rPr lang="ko-KR" altLang="en-US" sz="1200" b="1" i="1" dirty="0">
-                <a:solidFill>
-                  <a:schemeClr val="tx1">
-                    <a:lumMod val="50000"/>
-                    <a:lumOff val="50000"/>
-                  </a:schemeClr>
-                </a:solidFill>
-                <a:latin typeface="+mn-ea"/>
-              </a:rPr>
-              <a:t> 개발할 예정</a:t>
-            </a:r>
-          </a:p>
-        </p:txBody>
-      </p:sp>
-    </p:spTree>
-    <p:extLst>
-      <p:ext uri="{BB962C8B-B14F-4D97-AF65-F5344CB8AC3E}">
-        <p14:creationId xmlns:p14="http://schemas.microsoft.com/office/powerpoint/2010/main" val="1105323630"/>
-      </p:ext>
-    </p:extLst>
-  </p:cSld>
-  <p:clrMapOvr>
-    <a:masterClrMapping/>
-  </p:clrMapOvr>
-</p:sld>
-</file>
-
-<file path=ppt/slides/slide6.xml><?xml version="1.0" encoding="utf-8"?>
 <p:sld xmlns:a="http://schemas.openxmlformats.org/drawingml/2006/main" xmlns:r="http://schemas.openxmlformats.org/officeDocument/2006/relationships" xmlns:p="http://schemas.openxmlformats.org/presentationml/2006/main">
   <p:cSld>
     <p:spTree>

--- a/문서/[진료] 약 처방 지원 시스템 초안.pptx
+++ b/문서/[진료] 약 처방 지원 시스템 초안.pptx
@@ -4193,7 +4193,7 @@
           </p:cNvPicPr>
           <p:nvPr/>
         </p:nvPicPr>
-        <p:blipFill>
+        <p:blipFill rotWithShape="1">
           <a:blip r:embed="rId2">
             <a:extLst>
               <a:ext uri="{28A0092B-C50C-407E-A947-70E740481C1C}">
@@ -4201,14 +4201,13 @@
               </a:ext>
             </a:extLst>
           </a:blip>
-          <a:stretch>
-            <a:fillRect/>
-          </a:stretch>
+          <a:srcRect r="436" b="668"/>
+          <a:stretch/>
         </p:blipFill>
         <p:spPr>
           <a:xfrm>
-            <a:off x="2007279" y="1060016"/>
-            <a:ext cx="5051802" cy="4881516"/>
+            <a:off x="1913468" y="963019"/>
+            <a:ext cx="5122332" cy="4950819"/>
           </a:xfrm>
           <a:prstGeom prst="roundRect">
             <a:avLst>
@@ -5020,7 +5019,7 @@
         </p:nvSpPr>
         <p:spPr>
           <a:xfrm>
-            <a:off x="6736581" y="4272291"/>
+            <a:off x="6736581" y="4213329"/>
             <a:ext cx="111760" cy="112390"/>
           </a:xfrm>
           <a:prstGeom prst="line">
@@ -5051,7 +5050,7 @@
         </p:nvSpPr>
         <p:spPr>
           <a:xfrm>
-            <a:off x="6837165" y="4317244"/>
+            <a:off x="6837165" y="4258282"/>
             <a:ext cx="279400" cy="22478"/>
           </a:xfrm>
           <a:prstGeom prst="rect">
@@ -5082,7 +5081,7 @@
         </p:nvSpPr>
         <p:spPr>
           <a:xfrm>
-            <a:off x="7164741" y="4099548"/>
+            <a:off x="7164741" y="4072841"/>
             <a:ext cx="1575566" cy="280975"/>
           </a:xfrm>
           <a:prstGeom prst="rect">
@@ -5147,7 +5146,7 @@
         </p:nvSpPr>
         <p:spPr>
           <a:xfrm>
-            <a:off x="7164741" y="4384681"/>
+            <a:off x="7164741" y="4359456"/>
             <a:ext cx="3833885" cy="337171"/>
           </a:xfrm>
           <a:prstGeom prst="rect">
@@ -5314,7 +5313,7 @@
         </p:blipFill>
         <p:spPr>
           <a:xfrm>
-            <a:off x="1345016" y="1531766"/>
+            <a:off x="1277282" y="1556448"/>
             <a:ext cx="5750049" cy="3575771"/>
           </a:xfrm>
           <a:prstGeom prst="roundRect">
@@ -5345,7 +5344,7 @@
         </p:nvSpPr>
         <p:spPr>
           <a:xfrm>
-            <a:off x="6756059" y="1800764"/>
+            <a:off x="6688325" y="1825446"/>
             <a:ext cx="111760" cy="112390"/>
           </a:xfrm>
           <a:prstGeom prst="line">
@@ -5376,7 +5375,7 @@
         </p:nvSpPr>
         <p:spPr>
           <a:xfrm>
-            <a:off x="6856643" y="1845720"/>
+            <a:off x="6788909" y="1870402"/>
             <a:ext cx="279400" cy="22478"/>
           </a:xfrm>
           <a:prstGeom prst="rect">
@@ -5407,7 +5406,7 @@
         </p:nvSpPr>
         <p:spPr>
           <a:xfrm>
-            <a:off x="7136042" y="1715987"/>
+            <a:off x="7068308" y="1740669"/>
             <a:ext cx="1524765" cy="280975"/>
           </a:xfrm>
           <a:prstGeom prst="rect">
@@ -5465,7 +5464,7 @@
         </p:nvSpPr>
         <p:spPr>
           <a:xfrm>
-            <a:off x="7136043" y="1974484"/>
+            <a:off x="7068309" y="1999166"/>
             <a:ext cx="3967480" cy="337170"/>
           </a:xfrm>
           <a:prstGeom prst="rect">
@@ -5534,7 +5533,7 @@
         </p:nvSpPr>
         <p:spPr>
           <a:xfrm>
-            <a:off x="6744884" y="3114244"/>
+            <a:off x="6677150" y="3138926"/>
             <a:ext cx="111760" cy="112390"/>
           </a:xfrm>
           <a:prstGeom prst="line">
@@ -5565,7 +5564,7 @@
         </p:nvSpPr>
         <p:spPr>
           <a:xfrm>
-            <a:off x="6856643" y="3159006"/>
+            <a:off x="6788909" y="3183688"/>
             <a:ext cx="279400" cy="22478"/>
           </a:xfrm>
           <a:prstGeom prst="rect">
@@ -5596,7 +5595,7 @@
         </p:nvSpPr>
         <p:spPr>
           <a:xfrm>
-            <a:off x="7136042" y="3006989"/>
+            <a:off x="7068308" y="3031671"/>
             <a:ext cx="1773008" cy="280975"/>
           </a:xfrm>
           <a:prstGeom prst="rect">
@@ -5654,7 +5653,7 @@
         </p:nvSpPr>
         <p:spPr>
           <a:xfrm>
-            <a:off x="7136043" y="3265292"/>
+            <a:off x="7068309" y="3289974"/>
             <a:ext cx="3967480" cy="337170"/>
           </a:xfrm>
           <a:prstGeom prst="rect">
